--- a/Modules/Day_5/MatchingAlgorithms_Lecture.pptx
+++ b/Modules/Day_5/MatchingAlgorithms_Lecture.pptx
@@ -5,7 +5,7 @@
     <p:sldMasterId id="2147483648" r:id="rId1"/>
   </p:sldMasterIdLst>
   <p:notesMasterIdLst>
-    <p:notesMasterId r:id="rId18"/>
+    <p:notesMasterId r:id="rId21"/>
   </p:notesMasterIdLst>
   <p:sldIdLst>
     <p:sldId id="267" r:id="rId2"/>
@@ -13,17 +13,20 @@
     <p:sldId id="268" r:id="rId4"/>
     <p:sldId id="258" r:id="rId5"/>
     <p:sldId id="259" r:id="rId6"/>
-    <p:sldId id="260" r:id="rId7"/>
-    <p:sldId id="276" r:id="rId8"/>
-    <p:sldId id="261" r:id="rId9"/>
+    <p:sldId id="278" r:id="rId7"/>
+    <p:sldId id="260" r:id="rId8"/>
+    <p:sldId id="276" r:id="rId9"/>
     <p:sldId id="270" r:id="rId10"/>
     <p:sldId id="277" r:id="rId11"/>
-    <p:sldId id="272" r:id="rId12"/>
-    <p:sldId id="273" r:id="rId13"/>
-    <p:sldId id="262" r:id="rId14"/>
-    <p:sldId id="275" r:id="rId15"/>
-    <p:sldId id="264" r:id="rId16"/>
-    <p:sldId id="265" r:id="rId17"/>
+    <p:sldId id="261" r:id="rId12"/>
+    <p:sldId id="279" r:id="rId13"/>
+    <p:sldId id="272" r:id="rId14"/>
+    <p:sldId id="273" r:id="rId15"/>
+    <p:sldId id="262" r:id="rId16"/>
+    <p:sldId id="275" r:id="rId17"/>
+    <p:sldId id="264" r:id="rId18"/>
+    <p:sldId id="265" r:id="rId19"/>
+    <p:sldId id="280" r:id="rId20"/>
   </p:sldIdLst>
   <p:sldSz cx="9144000" cy="6858000" type="screen4x3"/>
   <p:notesSz cx="6858000" cy="9144000"/>
@@ -223,7 +226,7 @@
           <a:p>
             <a:fld id="{901D2072-C747-BA45-AA31-63E5215A7462}" type="datetimeFigureOut">
               <a:rPr lang="en-US" smtClean="0"/>
-              <a:t>4/9/26</a:t>
+              <a:t>4/21/26</a:t>
             </a:fld>
             <a:endParaRPr lang="en-US"/>
           </a:p>
@@ -564,7 +567,7 @@
     </p:spTree>
     <p:extLst>
       <p:ext uri="{BB962C8B-B14F-4D97-AF65-F5344CB8AC3E}">
-        <p14:creationId xmlns:p14="http://schemas.microsoft.com/office/powerpoint/2010/main" val="2579884285"/>
+        <p14:creationId xmlns:p14="http://schemas.microsoft.com/office/powerpoint/2010/main" val="3384849946"/>
       </p:ext>
     </p:extLst>
   </p:cSld>
@@ -648,7 +651,7 @@
     </p:spTree>
     <p:extLst>
       <p:ext uri="{BB962C8B-B14F-4D97-AF65-F5344CB8AC3E}">
-        <p14:creationId xmlns:p14="http://schemas.microsoft.com/office/powerpoint/2010/main" val="413328775"/>
+        <p14:creationId xmlns:p14="http://schemas.microsoft.com/office/powerpoint/2010/main" val="4030145542"/>
       </p:ext>
     </p:extLst>
   </p:cSld>
@@ -702,10 +705,7 @@
           <a:bodyPr/>
           <a:lstStyle/>
           <a:p>
-            <a:r>
-              <a:rPr lang="en-US" dirty="0"/>
-              <a:t>Give break</a:t>
-            </a:r>
+            <a:endParaRPr lang="en-US" dirty="0"/>
           </a:p>
         </p:txBody>
       </p:sp>
@@ -735,7 +735,7 @@
     </p:spTree>
     <p:extLst>
       <p:ext uri="{BB962C8B-B14F-4D97-AF65-F5344CB8AC3E}">
-        <p14:creationId xmlns:p14="http://schemas.microsoft.com/office/powerpoint/2010/main" val="1277056379"/>
+        <p14:creationId xmlns:p14="http://schemas.microsoft.com/office/powerpoint/2010/main" val="998741101"/>
       </p:ext>
     </p:extLst>
   </p:cSld>
@@ -819,7 +819,7 @@
     </p:spTree>
     <p:extLst>
       <p:ext uri="{BB962C8B-B14F-4D97-AF65-F5344CB8AC3E}">
-        <p14:creationId xmlns:p14="http://schemas.microsoft.com/office/powerpoint/2010/main" val="299683367"/>
+        <p14:creationId xmlns:p14="http://schemas.microsoft.com/office/powerpoint/2010/main" val="1458184163"/>
       </p:ext>
     </p:extLst>
   </p:cSld>
@@ -903,7 +903,259 @@
     </p:spTree>
     <p:extLst>
       <p:ext uri="{BB962C8B-B14F-4D97-AF65-F5344CB8AC3E}">
-        <p14:creationId xmlns:p14="http://schemas.microsoft.com/office/powerpoint/2010/main" val="1804867254"/>
+        <p14:creationId xmlns:p14="http://schemas.microsoft.com/office/powerpoint/2010/main" val="1557135150"/>
+      </p:ext>
+    </p:extLst>
+  </p:cSld>
+  <p:clrMapOvr>
+    <a:masterClrMapping/>
+  </p:clrMapOvr>
+</p:notes>
+</file>
+
+<file path=ppt/notesSlides/notesSlide14.xml><?xml version="1.0" encoding="utf-8"?>
+<p:notes xmlns:a="http://schemas.openxmlformats.org/drawingml/2006/main" xmlns:r="http://schemas.openxmlformats.org/officeDocument/2006/relationships" xmlns:p="http://schemas.openxmlformats.org/presentationml/2006/main">
+  <p:cSld>
+    <p:spTree>
+      <p:nvGrpSpPr>
+        <p:cNvPr id="1" name=""/>
+        <p:cNvGrpSpPr/>
+        <p:nvPr/>
+      </p:nvGrpSpPr>
+      <p:grpSpPr>
+        <a:xfrm>
+          <a:off x="0" y="0"/>
+          <a:ext cx="0" cy="0"/>
+          <a:chOff x="0" y="0"/>
+          <a:chExt cx="0" cy="0"/>
+        </a:xfrm>
+      </p:grpSpPr>
+      <p:sp>
+        <p:nvSpPr>
+          <p:cNvPr id="2" name="Slide Image Placeholder 1"/>
+          <p:cNvSpPr>
+            <a:spLocks noGrp="1" noRot="1" noChangeAspect="1"/>
+          </p:cNvSpPr>
+          <p:nvPr>
+            <p:ph type="sldImg"/>
+          </p:nvPr>
+        </p:nvSpPr>
+        <p:spPr/>
+      </p:sp>
+      <p:sp>
+        <p:nvSpPr>
+          <p:cNvPr id="3" name="Notes Placeholder 2"/>
+          <p:cNvSpPr>
+            <a:spLocks noGrp="1"/>
+          </p:cNvSpPr>
+          <p:nvPr>
+            <p:ph type="body" idx="1"/>
+          </p:nvPr>
+        </p:nvSpPr>
+        <p:spPr/>
+        <p:txBody>
+          <a:bodyPr/>
+          <a:lstStyle/>
+          <a:p>
+            <a:endParaRPr lang="en-US" dirty="0"/>
+          </a:p>
+        </p:txBody>
+      </p:sp>
+      <p:sp>
+        <p:nvSpPr>
+          <p:cNvPr id="4" name="Slide Number Placeholder 3"/>
+          <p:cNvSpPr>
+            <a:spLocks noGrp="1"/>
+          </p:cNvSpPr>
+          <p:nvPr>
+            <p:ph type="sldNum" sz="quarter" idx="5"/>
+          </p:nvPr>
+        </p:nvSpPr>
+        <p:spPr/>
+        <p:txBody>
+          <a:bodyPr/>
+          <a:lstStyle/>
+          <a:p>
+            <a:fld id="{7843CBE1-996A-A944-8861-0FE2554D9E7F}" type="slidenum">
+              <a:rPr lang="en-US" smtClean="0"/>
+              <a:t>15</a:t>
+            </a:fld>
+            <a:endParaRPr lang="en-US"/>
+          </a:p>
+        </p:txBody>
+      </p:sp>
+    </p:spTree>
+    <p:extLst>
+      <p:ext uri="{BB962C8B-B14F-4D97-AF65-F5344CB8AC3E}">
+        <p14:creationId xmlns:p14="http://schemas.microsoft.com/office/powerpoint/2010/main" val="3576608926"/>
+      </p:ext>
+    </p:extLst>
+  </p:cSld>
+  <p:clrMapOvr>
+    <a:masterClrMapping/>
+  </p:clrMapOvr>
+</p:notes>
+</file>
+
+<file path=ppt/notesSlides/notesSlide15.xml><?xml version="1.0" encoding="utf-8"?>
+<p:notes xmlns:a="http://schemas.openxmlformats.org/drawingml/2006/main" xmlns:r="http://schemas.openxmlformats.org/officeDocument/2006/relationships" xmlns:p="http://schemas.openxmlformats.org/presentationml/2006/main">
+  <p:cSld>
+    <p:spTree>
+      <p:nvGrpSpPr>
+        <p:cNvPr id="1" name=""/>
+        <p:cNvGrpSpPr/>
+        <p:nvPr/>
+      </p:nvGrpSpPr>
+      <p:grpSpPr>
+        <a:xfrm>
+          <a:off x="0" y="0"/>
+          <a:ext cx="0" cy="0"/>
+          <a:chOff x="0" y="0"/>
+          <a:chExt cx="0" cy="0"/>
+        </a:xfrm>
+      </p:grpSpPr>
+      <p:sp>
+        <p:nvSpPr>
+          <p:cNvPr id="2" name="Slide Image Placeholder 1"/>
+          <p:cNvSpPr>
+            <a:spLocks noGrp="1" noRot="1" noChangeAspect="1"/>
+          </p:cNvSpPr>
+          <p:nvPr>
+            <p:ph type="sldImg"/>
+          </p:nvPr>
+        </p:nvSpPr>
+        <p:spPr/>
+      </p:sp>
+      <p:sp>
+        <p:nvSpPr>
+          <p:cNvPr id="3" name="Notes Placeholder 2"/>
+          <p:cNvSpPr>
+            <a:spLocks noGrp="1"/>
+          </p:cNvSpPr>
+          <p:nvPr>
+            <p:ph type="body" idx="1"/>
+          </p:nvPr>
+        </p:nvSpPr>
+        <p:spPr/>
+        <p:txBody>
+          <a:bodyPr/>
+          <a:lstStyle/>
+          <a:p>
+            <a:endParaRPr lang="en-US" dirty="0"/>
+          </a:p>
+        </p:txBody>
+      </p:sp>
+      <p:sp>
+        <p:nvSpPr>
+          <p:cNvPr id="4" name="Slide Number Placeholder 3"/>
+          <p:cNvSpPr>
+            <a:spLocks noGrp="1"/>
+          </p:cNvSpPr>
+          <p:nvPr>
+            <p:ph type="sldNum" sz="quarter" idx="5"/>
+          </p:nvPr>
+        </p:nvSpPr>
+        <p:spPr/>
+        <p:txBody>
+          <a:bodyPr/>
+          <a:lstStyle/>
+          <a:p>
+            <a:fld id="{7843CBE1-996A-A944-8861-0FE2554D9E7F}" type="slidenum">
+              <a:rPr lang="en-US" smtClean="0"/>
+              <a:t>16</a:t>
+            </a:fld>
+            <a:endParaRPr lang="en-US"/>
+          </a:p>
+        </p:txBody>
+      </p:sp>
+    </p:spTree>
+    <p:extLst>
+      <p:ext uri="{BB962C8B-B14F-4D97-AF65-F5344CB8AC3E}">
+        <p14:creationId xmlns:p14="http://schemas.microsoft.com/office/powerpoint/2010/main" val="3891458934"/>
+      </p:ext>
+    </p:extLst>
+  </p:cSld>
+  <p:clrMapOvr>
+    <a:masterClrMapping/>
+  </p:clrMapOvr>
+</p:notes>
+</file>
+
+<file path=ppt/notesSlides/notesSlide16.xml><?xml version="1.0" encoding="utf-8"?>
+<p:notes xmlns:a="http://schemas.openxmlformats.org/drawingml/2006/main" xmlns:r="http://schemas.openxmlformats.org/officeDocument/2006/relationships" xmlns:p="http://schemas.openxmlformats.org/presentationml/2006/main">
+  <p:cSld>
+    <p:spTree>
+      <p:nvGrpSpPr>
+        <p:cNvPr id="1" name=""/>
+        <p:cNvGrpSpPr/>
+        <p:nvPr/>
+      </p:nvGrpSpPr>
+      <p:grpSpPr>
+        <a:xfrm>
+          <a:off x="0" y="0"/>
+          <a:ext cx="0" cy="0"/>
+          <a:chOff x="0" y="0"/>
+          <a:chExt cx="0" cy="0"/>
+        </a:xfrm>
+      </p:grpSpPr>
+      <p:sp>
+        <p:nvSpPr>
+          <p:cNvPr id="2" name="Slide Image Placeholder 1"/>
+          <p:cNvSpPr>
+            <a:spLocks noGrp="1" noRot="1" noChangeAspect="1"/>
+          </p:cNvSpPr>
+          <p:nvPr>
+            <p:ph type="sldImg"/>
+          </p:nvPr>
+        </p:nvSpPr>
+        <p:spPr/>
+      </p:sp>
+      <p:sp>
+        <p:nvSpPr>
+          <p:cNvPr id="3" name="Notes Placeholder 2"/>
+          <p:cNvSpPr>
+            <a:spLocks noGrp="1"/>
+          </p:cNvSpPr>
+          <p:nvPr>
+            <p:ph type="body" idx="1"/>
+          </p:nvPr>
+        </p:nvSpPr>
+        <p:spPr/>
+        <p:txBody>
+          <a:bodyPr/>
+          <a:lstStyle/>
+          <a:p>
+            <a:endParaRPr lang="en-US" dirty="0"/>
+          </a:p>
+        </p:txBody>
+      </p:sp>
+      <p:sp>
+        <p:nvSpPr>
+          <p:cNvPr id="4" name="Slide Number Placeholder 3"/>
+          <p:cNvSpPr>
+            <a:spLocks noGrp="1"/>
+          </p:cNvSpPr>
+          <p:nvPr>
+            <p:ph type="sldNum" sz="quarter" idx="5"/>
+          </p:nvPr>
+        </p:nvSpPr>
+        <p:spPr/>
+        <p:txBody>
+          <a:bodyPr/>
+          <a:lstStyle/>
+          <a:p>
+            <a:fld id="{7843CBE1-996A-A944-8861-0FE2554D9E7F}" type="slidenum">
+              <a:rPr lang="en-US" smtClean="0"/>
+              <a:t>19</a:t>
+            </a:fld>
+            <a:endParaRPr lang="en-US"/>
+          </a:p>
+        </p:txBody>
+      </p:sp>
+    </p:spTree>
+    <p:extLst>
+      <p:ext uri="{BB962C8B-B14F-4D97-AF65-F5344CB8AC3E}">
+        <p14:creationId xmlns:p14="http://schemas.microsoft.com/office/powerpoint/2010/main" val="1005380872"/>
       </p:ext>
     </p:extLst>
   </p:cSld>
@@ -987,7 +1239,7 @@
     </p:spTree>
     <p:extLst>
       <p:ext uri="{BB962C8B-B14F-4D97-AF65-F5344CB8AC3E}">
-        <p14:creationId xmlns:p14="http://schemas.microsoft.com/office/powerpoint/2010/main" val="1288463247"/>
+        <p14:creationId xmlns:p14="http://schemas.microsoft.com/office/powerpoint/2010/main" val="2318160573"/>
       </p:ext>
     </p:extLst>
   </p:cSld>
@@ -1071,7 +1323,7 @@
     </p:spTree>
     <p:extLst>
       <p:ext uri="{BB962C8B-B14F-4D97-AF65-F5344CB8AC3E}">
-        <p14:creationId xmlns:p14="http://schemas.microsoft.com/office/powerpoint/2010/main" val="2866137195"/>
+        <p14:creationId xmlns:p14="http://schemas.microsoft.com/office/powerpoint/2010/main" val="1996422421"/>
       </p:ext>
     </p:extLst>
   </p:cSld>
@@ -1155,7 +1407,7 @@
     </p:spTree>
     <p:extLst>
       <p:ext uri="{BB962C8B-B14F-4D97-AF65-F5344CB8AC3E}">
-        <p14:creationId xmlns:p14="http://schemas.microsoft.com/office/powerpoint/2010/main" val="1003687523"/>
+        <p14:creationId xmlns:p14="http://schemas.microsoft.com/office/powerpoint/2010/main" val="1099876212"/>
       </p:ext>
     </p:extLst>
   </p:cSld>
@@ -1239,7 +1491,7 @@
     </p:spTree>
     <p:extLst>
       <p:ext uri="{BB962C8B-B14F-4D97-AF65-F5344CB8AC3E}">
-        <p14:creationId xmlns:p14="http://schemas.microsoft.com/office/powerpoint/2010/main" val="1820565484"/>
+        <p14:creationId xmlns:p14="http://schemas.microsoft.com/office/powerpoint/2010/main" val="4289979474"/>
       </p:ext>
     </p:extLst>
   </p:cSld>
@@ -1323,7 +1575,7 @@
     </p:spTree>
     <p:extLst>
       <p:ext uri="{BB962C8B-B14F-4D97-AF65-F5344CB8AC3E}">
-        <p14:creationId xmlns:p14="http://schemas.microsoft.com/office/powerpoint/2010/main" val="756037148"/>
+        <p14:creationId xmlns:p14="http://schemas.microsoft.com/office/powerpoint/2010/main" val="2598636902"/>
       </p:ext>
     </p:extLst>
   </p:cSld>
@@ -1407,7 +1659,7 @@
     </p:spTree>
     <p:extLst>
       <p:ext uri="{BB962C8B-B14F-4D97-AF65-F5344CB8AC3E}">
-        <p14:creationId xmlns:p14="http://schemas.microsoft.com/office/powerpoint/2010/main" val="3829447244"/>
+        <p14:creationId xmlns:p14="http://schemas.microsoft.com/office/powerpoint/2010/main" val="1387653416"/>
       </p:ext>
     </p:extLst>
   </p:cSld>
@@ -1491,7 +1743,7 @@
     </p:spTree>
     <p:extLst>
       <p:ext uri="{BB962C8B-B14F-4D97-AF65-F5344CB8AC3E}">
-        <p14:creationId xmlns:p14="http://schemas.microsoft.com/office/powerpoint/2010/main" val="2343338685"/>
+        <p14:creationId xmlns:p14="http://schemas.microsoft.com/office/powerpoint/2010/main" val="266549435"/>
       </p:ext>
     </p:extLst>
   </p:cSld>
@@ -1575,7 +1827,7 @@
     </p:spTree>
     <p:extLst>
       <p:ext uri="{BB962C8B-B14F-4D97-AF65-F5344CB8AC3E}">
-        <p14:creationId xmlns:p14="http://schemas.microsoft.com/office/powerpoint/2010/main" val="1261006032"/>
+        <p14:creationId xmlns:p14="http://schemas.microsoft.com/office/powerpoint/2010/main" val="3894297097"/>
       </p:ext>
     </p:extLst>
   </p:cSld>
@@ -1764,7 +2016,7 @@
           <a:p>
             <a:fld id="{5BCAD085-E8A6-8845-BD4E-CB4CCA059FC4}" type="datetimeFigureOut">
               <a:rPr lang="en-US" smtClean="0"/>
-              <a:t>4/9/26</a:t>
+              <a:t>4/21/26</a:t>
             </a:fld>
             <a:endParaRPr lang="en-US"/>
           </a:p>
@@ -1932,7 +2184,7 @@
           <a:p>
             <a:fld id="{5BCAD085-E8A6-8845-BD4E-CB4CCA059FC4}" type="datetimeFigureOut">
               <a:rPr lang="en-US" smtClean="0"/>
-              <a:t>4/9/26</a:t>
+              <a:t>4/21/26</a:t>
             </a:fld>
             <a:endParaRPr lang="en-US"/>
           </a:p>
@@ -2110,7 +2362,7 @@
           <a:p>
             <a:fld id="{5BCAD085-E8A6-8845-BD4E-CB4CCA059FC4}" type="datetimeFigureOut">
               <a:rPr lang="en-US" smtClean="0"/>
-              <a:t>4/9/26</a:t>
+              <a:t>4/21/26</a:t>
             </a:fld>
             <a:endParaRPr lang="en-US"/>
           </a:p>
@@ -2278,7 +2530,7 @@
           <a:p>
             <a:fld id="{5BCAD085-E8A6-8845-BD4E-CB4CCA059FC4}" type="datetimeFigureOut">
               <a:rPr lang="en-US" smtClean="0"/>
-              <a:t>4/9/26</a:t>
+              <a:t>4/21/26</a:t>
             </a:fld>
             <a:endParaRPr lang="en-US"/>
           </a:p>
@@ -2523,7 +2775,7 @@
           <a:p>
             <a:fld id="{5BCAD085-E8A6-8845-BD4E-CB4CCA059FC4}" type="datetimeFigureOut">
               <a:rPr lang="en-US" smtClean="0"/>
-              <a:t>4/9/26</a:t>
+              <a:t>4/21/26</a:t>
             </a:fld>
             <a:endParaRPr lang="en-US"/>
           </a:p>
@@ -2808,7 +3060,7 @@
           <a:p>
             <a:fld id="{5BCAD085-E8A6-8845-BD4E-CB4CCA059FC4}" type="datetimeFigureOut">
               <a:rPr lang="en-US" smtClean="0"/>
-              <a:t>4/9/26</a:t>
+              <a:t>4/21/26</a:t>
             </a:fld>
             <a:endParaRPr lang="en-US"/>
           </a:p>
@@ -3227,7 +3479,7 @@
           <a:p>
             <a:fld id="{5BCAD085-E8A6-8845-BD4E-CB4CCA059FC4}" type="datetimeFigureOut">
               <a:rPr lang="en-US" smtClean="0"/>
-              <a:t>4/9/26</a:t>
+              <a:t>4/21/26</a:t>
             </a:fld>
             <a:endParaRPr lang="en-US"/>
           </a:p>
@@ -3344,7 +3596,7 @@
           <a:p>
             <a:fld id="{5BCAD085-E8A6-8845-BD4E-CB4CCA059FC4}" type="datetimeFigureOut">
               <a:rPr lang="en-US" smtClean="0"/>
-              <a:t>4/9/26</a:t>
+              <a:t>4/21/26</a:t>
             </a:fld>
             <a:endParaRPr lang="en-US"/>
           </a:p>
@@ -3439,7 +3691,7 @@
           <a:p>
             <a:fld id="{5BCAD085-E8A6-8845-BD4E-CB4CCA059FC4}" type="datetimeFigureOut">
               <a:rPr lang="en-US" smtClean="0"/>
-              <a:t>4/9/26</a:t>
+              <a:t>4/21/26</a:t>
             </a:fld>
             <a:endParaRPr lang="en-US"/>
           </a:p>
@@ -3714,7 +3966,7 @@
           <a:p>
             <a:fld id="{5BCAD085-E8A6-8845-BD4E-CB4CCA059FC4}" type="datetimeFigureOut">
               <a:rPr lang="en-US" smtClean="0"/>
-              <a:t>4/9/26</a:t>
+              <a:t>4/21/26</a:t>
             </a:fld>
             <a:endParaRPr lang="en-US"/>
           </a:p>
@@ -3966,7 +4218,7 @@
           <a:p>
             <a:fld id="{5BCAD085-E8A6-8845-BD4E-CB4CCA059FC4}" type="datetimeFigureOut">
               <a:rPr lang="en-US" smtClean="0"/>
-              <a:t>4/9/26</a:t>
+              <a:t>4/21/26</a:t>
             </a:fld>
             <a:endParaRPr lang="en-US"/>
           </a:p>
@@ -4177,7 +4429,7 @@
           <a:p>
             <a:fld id="{5BCAD085-E8A6-8845-BD4E-CB4CCA059FC4}" type="datetimeFigureOut">
               <a:rPr lang="en-US" smtClean="0"/>
-              <a:t>4/9/26</a:t>
+              <a:t>4/21/26</a:t>
             </a:fld>
             <a:endParaRPr lang="en-US"/>
           </a:p>
@@ -4590,7 +4842,7 @@
     </p:spTree>
     <p:extLst>
       <p:ext uri="{BB962C8B-B14F-4D97-AF65-F5344CB8AC3E}">
-        <p14:creationId xmlns:p14="http://schemas.microsoft.com/office/powerpoint/2010/main" val="1077060365"/>
+        <p14:creationId xmlns:p14="http://schemas.microsoft.com/office/powerpoint/2010/main" val="852453469"/>
       </p:ext>
     </p:extLst>
   </p:cSld>
@@ -4601,7 +4853,7 @@
 </file>
 
 <file path=ppt/slides/slide10.xml><?xml version="1.0" encoding="utf-8"?>
-<p:sld xmlns:a="http://schemas.openxmlformats.org/drawingml/2006/main" xmlns:r="http://schemas.openxmlformats.org/officeDocument/2006/relationships" xmlns:p="http://schemas.openxmlformats.org/presentationml/2006/main" show="0">
+<p:sld xmlns:a="http://schemas.openxmlformats.org/drawingml/2006/main" xmlns:r="http://schemas.openxmlformats.org/officeDocument/2006/relationships" xmlns:p="http://schemas.openxmlformats.org/presentationml/2006/main">
   <p:cSld>
     <p:spTree>
       <p:nvGrpSpPr>
@@ -4883,7 +5135,7 @@
     </p:spTree>
     <p:extLst>
       <p:ext uri="{BB962C8B-B14F-4D97-AF65-F5344CB8AC3E}">
-        <p14:creationId xmlns:p14="http://schemas.microsoft.com/office/powerpoint/2010/main" val="1928045972"/>
+        <p14:creationId xmlns:p14="http://schemas.microsoft.com/office/powerpoint/2010/main" val="3182749232"/>
       </p:ext>
     </p:extLst>
   </p:cSld>
@@ -4912,134 +5164,186 @@
       </p:grpSpPr>
       <p:sp>
         <p:nvSpPr>
-          <p:cNvPr id="2" name="Title 1">
+          <p:cNvPr id="2" name="Title 1"/>
+          <p:cNvSpPr>
+            <a:spLocks noGrp="1"/>
+          </p:cNvSpPr>
+          <p:nvPr>
+            <p:ph type="title"/>
+          </p:nvPr>
+        </p:nvSpPr>
+        <p:spPr>
+          <a:xfrm>
+            <a:off x="457200" y="274638"/>
+            <a:ext cx="8686800" cy="1143000"/>
+          </a:xfrm>
+        </p:spPr>
+        <p:txBody>
+          <a:bodyPr>
+            <a:normAutofit/>
+          </a:bodyPr>
+          <a:lstStyle/>
+          <a:p>
+            <a:r>
+              <a:rPr lang="en-US" dirty="0"/>
+              <a:t>Nearest neighbor matching</a:t>
+            </a:r>
+            <a:endParaRPr dirty="0"/>
+          </a:p>
+        </p:txBody>
+      </p:sp>
+      <p:sp>
+        <p:nvSpPr>
+          <p:cNvPr id="3" name="Content Placeholder 2"/>
+          <p:cNvSpPr>
+            <a:spLocks noGrp="1"/>
+          </p:cNvSpPr>
+          <p:nvPr>
+            <p:ph idx="1"/>
+          </p:nvPr>
+        </p:nvSpPr>
+        <p:spPr>
+          <a:xfrm>
+            <a:off x="457200" y="1600200"/>
+            <a:ext cx="8229600" cy="4195481"/>
+          </a:xfrm>
+        </p:spPr>
+        <p:txBody>
+          <a:bodyPr>
+            <a:normAutofit/>
+          </a:bodyPr>
+          <a:lstStyle/>
+          <a:p>
+            <a:pPr marL="0" indent="0">
+              <a:buNone/>
+            </a:pPr>
+            <a:r>
+              <a:rPr lang="en-US" sz="2400" b="1" dirty="0"/>
+              <a:t>1. Define similarity</a:t>
+            </a:r>
+          </a:p>
+          <a:p>
+            <a:pPr lvl="1"/>
+            <a:r>
+              <a:rPr lang="en-US" sz="2000" dirty="0"/>
+              <a:t>You first decide how to measure “closeness”:</a:t>
+            </a:r>
+          </a:p>
+          <a:p>
+            <a:pPr lvl="1"/>
+            <a:r>
+              <a:rPr lang="en-US" sz="2000" dirty="0"/>
+              <a:t>Difference in propensity scores (most common) </a:t>
+            </a:r>
+          </a:p>
+          <a:p>
+            <a:pPr lvl="1"/>
+            <a:r>
+              <a:rPr lang="en-US" sz="2000" dirty="0"/>
+              <a:t>Or a multivariate distance like </a:t>
+            </a:r>
+            <a:r>
+              <a:rPr lang="en-US" sz="2000" dirty="0" err="1"/>
+              <a:t>Mahalanobis</a:t>
+            </a:r>
+            <a:r>
+              <a:rPr lang="en-US" sz="2000" dirty="0"/>
+              <a:t> Distance </a:t>
+            </a:r>
+          </a:p>
+          <a:p>
+            <a:pPr marL="0" indent="0">
+              <a:buNone/>
+            </a:pPr>
+            <a:r>
+              <a:rPr lang="en-US" sz="2400" b="1" dirty="0"/>
+              <a:t>2. For each treated patient:</a:t>
+            </a:r>
+          </a:p>
+          <a:p>
+            <a:pPr lvl="1"/>
+            <a:r>
+              <a:rPr lang="en-US" sz="2000" dirty="0"/>
+              <a:t>Compute distance to all control patients </a:t>
+            </a:r>
+          </a:p>
+          <a:p>
+            <a:pPr lvl="1"/>
+            <a:r>
+              <a:rPr lang="en-US" sz="2000" dirty="0"/>
+              <a:t>Select the control with the </a:t>
+            </a:r>
+            <a:r>
+              <a:rPr lang="en-US" sz="2000" b="1" dirty="0"/>
+              <a:t>smallest distance</a:t>
+            </a:r>
+            <a:r>
+              <a:rPr lang="en-US" sz="2000" dirty="0"/>
+              <a:t> </a:t>
+            </a:r>
+          </a:p>
+          <a:p>
+            <a:pPr marL="0" indent="0">
+              <a:buNone/>
+            </a:pPr>
+            <a:r>
+              <a:rPr lang="en-US" sz="2400" b="1" dirty="0"/>
+              <a:t>3. Form matched pairs (or sets)</a:t>
+            </a:r>
+          </a:p>
+          <a:p>
+            <a:pPr lvl="1"/>
+            <a:r>
+              <a:rPr lang="en-US" sz="2000" dirty="0"/>
+              <a:t>1:1 matching → one control per treated </a:t>
+            </a:r>
+          </a:p>
+          <a:p>
+            <a:pPr lvl="1"/>
+            <a:r>
+              <a:rPr lang="en-US" sz="2000" dirty="0"/>
+              <a:t>1:k matching → multiple controls per treated </a:t>
+            </a:r>
+          </a:p>
+          <a:p>
+            <a:endParaRPr sz="2400" dirty="0"/>
+          </a:p>
+        </p:txBody>
+      </p:sp>
+      <p:pic>
+        <p:nvPicPr>
+          <p:cNvPr id="7" name="Picture 6">
             <a:extLst>
               <a:ext uri="{FF2B5EF4-FFF2-40B4-BE49-F238E27FC236}">
-                <a16:creationId xmlns:a16="http://schemas.microsoft.com/office/drawing/2014/main" id="{EC048FDC-97C9-FA4A-AEE1-7799682A51FD}"/>
+                <a16:creationId xmlns:a16="http://schemas.microsoft.com/office/drawing/2014/main" id="{99456AA2-4459-0843-B260-889E46AD1777}"/>
               </a:ext>
             </a:extLst>
           </p:cNvPr>
-          <p:cNvSpPr>
-            <a:spLocks noGrp="1"/>
-          </p:cNvSpPr>
-          <p:nvPr>
-            <p:ph type="title"/>
-          </p:nvPr>
-        </p:nvSpPr>
-        <p:spPr/>
-        <p:txBody>
-          <a:bodyPr/>
-          <a:lstStyle/>
-          <a:p>
-            <a:r>
-              <a:rPr lang="en-US" dirty="0"/>
-              <a:t>Advanced Matching Methods </a:t>
-            </a:r>
-          </a:p>
-        </p:txBody>
-      </p:sp>
-      <p:sp>
-        <p:nvSpPr>
-          <p:cNvPr id="3" name="Rectangle 2">
-            <a:extLst>
-              <a:ext uri="{FF2B5EF4-FFF2-40B4-BE49-F238E27FC236}">
-                <a16:creationId xmlns:a16="http://schemas.microsoft.com/office/drawing/2014/main" id="{51D68B01-C236-CB48-9857-DD365318E67A}"/>
-              </a:ext>
-            </a:extLst>
-          </p:cNvPr>
-          <p:cNvSpPr/>
+          <p:cNvPicPr>
+            <a:picLocks noChangeAspect="1"/>
+          </p:cNvPicPr>
           <p:nvPr/>
-        </p:nvSpPr>
+        </p:nvPicPr>
+        <p:blipFill>
+          <a:blip r:embed="rId3"/>
+          <a:stretch>
+            <a:fillRect/>
+          </a:stretch>
+        </p:blipFill>
         <p:spPr>
           <a:xfrm>
-            <a:off x="525199" y="1613118"/>
-            <a:ext cx="8161601" cy="4154984"/>
+            <a:off x="6178152" y="3580107"/>
+            <a:ext cx="2508648" cy="2884945"/>
           </a:xfrm>
           <a:prstGeom prst="rect">
             <a:avLst/>
           </a:prstGeom>
         </p:spPr>
-        <p:txBody>
-          <a:bodyPr wrap="square">
-            <a:spAutoFit/>
-          </a:bodyPr>
-          <a:lstStyle/>
-          <a:p>
-            <a:pPr marL="285750" indent="-285750">
-              <a:buFont typeface="Arial" panose="020B0604020202020204" pitchFamily="34" charset="0"/>
-              <a:buChar char="•"/>
-            </a:pPr>
-            <a:r>
-              <a:rPr lang="en-US" sz="2400" b="1" dirty="0"/>
-              <a:t>Kernel Matching / Weighting</a:t>
-            </a:r>
-          </a:p>
-          <a:p>
-            <a:pPr marL="742950" lvl="1" indent="-285750">
-              <a:buFont typeface="Arial" panose="020B0604020202020204" pitchFamily="34" charset="0"/>
-              <a:buChar char="•"/>
-            </a:pPr>
-            <a:r>
-              <a:rPr lang="en-US" sz="2400" dirty="0"/>
-              <a:t>Instead of matching pairs, assigns weights to all controls based on similarity </a:t>
-            </a:r>
-          </a:p>
-          <a:p>
-            <a:endParaRPr lang="en-US" sz="2400" b="1" dirty="0"/>
-          </a:p>
-          <a:p>
-            <a:pPr marL="342900" indent="-342900">
-              <a:buFont typeface="Arial" panose="020B0604020202020204" pitchFamily="34" charset="0"/>
-              <a:buChar char="•"/>
-            </a:pPr>
-            <a:r>
-              <a:rPr lang="en-US" sz="2400" b="1" dirty="0"/>
-              <a:t>Genetic Matching</a:t>
-            </a:r>
-          </a:p>
-          <a:p>
-            <a:pPr marL="800100" lvl="1" indent="-342900">
-              <a:buFont typeface="Arial" panose="020B0604020202020204" pitchFamily="34" charset="0"/>
-              <a:buChar char="•"/>
-            </a:pPr>
-            <a:r>
-              <a:rPr lang="en-US" sz="2400" dirty="0"/>
-              <a:t>Uses optimization algorithms to find the best balance across covariates </a:t>
-            </a:r>
-          </a:p>
-          <a:p>
-            <a:pPr marL="800100" lvl="1" indent="-342900">
-              <a:buFont typeface="Arial" panose="020B0604020202020204" pitchFamily="34" charset="0"/>
-              <a:buChar char="•"/>
-            </a:pPr>
-            <a:r>
-              <a:rPr lang="en-US" sz="2400" dirty="0"/>
-              <a:t>Iteratively improves matching quality </a:t>
-            </a:r>
-          </a:p>
-          <a:p>
-            <a:r>
-              <a:rPr lang="en-US" sz="2400" dirty="0"/>
-              <a:t>	✔ Very powerful</a:t>
-            </a:r>
-            <a:br>
-              <a:rPr lang="en-US" sz="2400" dirty="0"/>
-            </a:br>
-            <a:r>
-              <a:rPr lang="en-US" sz="2400" dirty="0"/>
-              <a:t>	✘ Computationally intensive</a:t>
-            </a:r>
-          </a:p>
-          <a:p>
-            <a:pPr lvl="1"/>
-            <a:endParaRPr lang="en-US" sz="2400" dirty="0"/>
-          </a:p>
-        </p:txBody>
-      </p:sp>
+      </p:pic>
     </p:spTree>
     <p:extLst>
       <p:ext uri="{BB962C8B-B14F-4D97-AF65-F5344CB8AC3E}">
-        <p14:creationId xmlns:p14="http://schemas.microsoft.com/office/powerpoint/2010/main" val="571854667"/>
+        <p14:creationId xmlns:p14="http://schemas.microsoft.com/office/powerpoint/2010/main" val="844506532"/>
       </p:ext>
     </p:extLst>
   </p:cSld>
@@ -5050,6 +5354,418 @@
 </file>
 
 <file path=ppt/slides/slide12.xml><?xml version="1.0" encoding="utf-8"?>
+<p:sld xmlns:a="http://schemas.openxmlformats.org/drawingml/2006/main" xmlns:r="http://schemas.openxmlformats.org/officeDocument/2006/relationships" xmlns:p="http://schemas.openxmlformats.org/presentationml/2006/main">
+  <p:cSld>
+    <p:spTree>
+      <p:nvGrpSpPr>
+        <p:cNvPr id="1" name=""/>
+        <p:cNvGrpSpPr/>
+        <p:nvPr/>
+      </p:nvGrpSpPr>
+      <p:grpSpPr>
+        <a:xfrm>
+          <a:off x="0" y="0"/>
+          <a:ext cx="0" cy="0"/>
+          <a:chOff x="0" y="0"/>
+          <a:chExt cx="0" cy="0"/>
+        </a:xfrm>
+      </p:grpSpPr>
+      <p:sp>
+        <p:nvSpPr>
+          <p:cNvPr id="2" name="Title 1"/>
+          <p:cNvSpPr>
+            <a:spLocks noGrp="1"/>
+          </p:cNvSpPr>
+          <p:nvPr>
+            <p:ph type="title"/>
+          </p:nvPr>
+        </p:nvSpPr>
+        <p:spPr>
+          <a:xfrm>
+            <a:off x="457200" y="274638"/>
+            <a:ext cx="8686800" cy="1143000"/>
+          </a:xfrm>
+        </p:spPr>
+        <p:txBody>
+          <a:bodyPr>
+            <a:normAutofit/>
+          </a:bodyPr>
+          <a:lstStyle/>
+          <a:p>
+            <a:r>
+              <a:rPr lang="en-US" dirty="0"/>
+              <a:t>Nearest neighbor matching</a:t>
+            </a:r>
+            <a:endParaRPr dirty="0"/>
+          </a:p>
+        </p:txBody>
+      </p:sp>
+      <p:pic>
+        <p:nvPicPr>
+          <p:cNvPr id="6" name="Picture 5">
+            <a:extLst>
+              <a:ext uri="{FF2B5EF4-FFF2-40B4-BE49-F238E27FC236}">
+                <a16:creationId xmlns:a16="http://schemas.microsoft.com/office/drawing/2014/main" id="{91D05DC6-74DD-F44F-A542-E20F981C23D1}"/>
+              </a:ext>
+            </a:extLst>
+          </p:cNvPr>
+          <p:cNvPicPr>
+            <a:picLocks noChangeAspect="1"/>
+          </p:cNvPicPr>
+          <p:nvPr/>
+        </p:nvPicPr>
+        <p:blipFill>
+          <a:blip r:embed="rId3"/>
+          <a:stretch>
+            <a:fillRect/>
+          </a:stretch>
+        </p:blipFill>
+        <p:spPr>
+          <a:xfrm>
+            <a:off x="1676494" y="1589916"/>
+            <a:ext cx="5506089" cy="4324013"/>
+          </a:xfrm>
+          <a:prstGeom prst="rect">
+            <a:avLst/>
+          </a:prstGeom>
+        </p:spPr>
+      </p:pic>
+      <p:grpSp>
+        <p:nvGrpSpPr>
+          <p:cNvPr id="11" name="Group 10">
+            <a:extLst>
+              <a:ext uri="{FF2B5EF4-FFF2-40B4-BE49-F238E27FC236}">
+                <a16:creationId xmlns:a16="http://schemas.microsoft.com/office/drawing/2014/main" id="{7C5ED6DB-887B-1F4C-BECA-746E7C8B883C}"/>
+              </a:ext>
+            </a:extLst>
+          </p:cNvPr>
+          <p:cNvGrpSpPr/>
+          <p:nvPr/>
+        </p:nvGrpSpPr>
+        <p:grpSpPr>
+          <a:xfrm>
+            <a:off x="571263" y="1417638"/>
+            <a:ext cx="1105231" cy="523220"/>
+            <a:chOff x="365760" y="1388609"/>
+            <a:chExt cx="1105231" cy="523220"/>
+          </a:xfrm>
+        </p:grpSpPr>
+        <p:sp>
+          <p:nvSpPr>
+            <p:cNvPr id="8" name="Rectangle 7">
+              <a:extLst>
+                <a:ext uri="{FF2B5EF4-FFF2-40B4-BE49-F238E27FC236}">
+                  <a16:creationId xmlns:a16="http://schemas.microsoft.com/office/drawing/2014/main" id="{B1C2EBA0-550E-0840-A332-0561C66A228C}"/>
+                </a:ext>
+              </a:extLst>
+            </p:cNvPr>
+            <p:cNvSpPr/>
+            <p:nvPr/>
+          </p:nvSpPr>
+          <p:spPr>
+            <a:xfrm>
+              <a:off x="365760" y="1444142"/>
+              <a:ext cx="182880" cy="182880"/>
+            </a:xfrm>
+            <a:prstGeom prst="rect">
+              <a:avLst/>
+            </a:prstGeom>
+            <a:solidFill>
+              <a:srgbClr val="FF0000"/>
+            </a:solidFill>
+            <a:ln w="3175"/>
+          </p:spPr>
+          <p:style>
+            <a:lnRef idx="2">
+              <a:schemeClr val="dk1"/>
+            </a:lnRef>
+            <a:fillRef idx="1">
+              <a:schemeClr val="lt1"/>
+            </a:fillRef>
+            <a:effectRef idx="0">
+              <a:schemeClr val="dk1"/>
+            </a:effectRef>
+            <a:fontRef idx="minor">
+              <a:schemeClr val="dk1"/>
+            </a:fontRef>
+          </p:style>
+          <p:txBody>
+            <a:bodyPr rtlCol="0" anchor="ctr"/>
+            <a:lstStyle/>
+            <a:p>
+              <a:pPr algn="ctr"/>
+              <a:endParaRPr lang="en-US">
+                <a:solidFill>
+                  <a:schemeClr val="tx1"/>
+                </a:solidFill>
+              </a:endParaRPr>
+            </a:p>
+          </p:txBody>
+        </p:sp>
+        <p:sp>
+          <p:nvSpPr>
+            <p:cNvPr id="9" name="Oval 8">
+              <a:extLst>
+                <a:ext uri="{FF2B5EF4-FFF2-40B4-BE49-F238E27FC236}">
+                  <a16:creationId xmlns:a16="http://schemas.microsoft.com/office/drawing/2014/main" id="{3230C3BC-4470-E544-834B-7496132A2530}"/>
+                </a:ext>
+              </a:extLst>
+            </p:cNvPr>
+            <p:cNvSpPr/>
+            <p:nvPr/>
+          </p:nvSpPr>
+          <p:spPr>
+            <a:xfrm>
+              <a:off x="365760" y="1674730"/>
+              <a:ext cx="182880" cy="182880"/>
+            </a:xfrm>
+            <a:prstGeom prst="ellipse">
+              <a:avLst/>
+            </a:prstGeom>
+            <a:solidFill>
+              <a:schemeClr val="accent1"/>
+            </a:solidFill>
+            <a:ln w="3175">
+              <a:solidFill>
+                <a:schemeClr val="tx1"/>
+              </a:solidFill>
+            </a:ln>
+          </p:spPr>
+          <p:style>
+            <a:lnRef idx="2">
+              <a:schemeClr val="accent1"/>
+            </a:lnRef>
+            <a:fillRef idx="1">
+              <a:schemeClr val="lt1"/>
+            </a:fillRef>
+            <a:effectRef idx="0">
+              <a:schemeClr val="accent1"/>
+            </a:effectRef>
+            <a:fontRef idx="minor">
+              <a:schemeClr val="dk1"/>
+            </a:fontRef>
+          </p:style>
+          <p:txBody>
+            <a:bodyPr rtlCol="0" anchor="ctr"/>
+            <a:lstStyle/>
+            <a:p>
+              <a:pPr algn="ctr"/>
+              <a:endParaRPr lang="en-US"/>
+            </a:p>
+          </p:txBody>
+        </p:sp>
+        <p:sp>
+          <p:nvSpPr>
+            <p:cNvPr id="10" name="TextBox 9">
+              <a:extLst>
+                <a:ext uri="{FF2B5EF4-FFF2-40B4-BE49-F238E27FC236}">
+                  <a16:creationId xmlns:a16="http://schemas.microsoft.com/office/drawing/2014/main" id="{01BB2524-3BD0-224B-B7FB-313960AFACEF}"/>
+                </a:ext>
+              </a:extLst>
+            </p:cNvPr>
+            <p:cNvSpPr txBox="1"/>
+            <p:nvPr/>
+          </p:nvSpPr>
+          <p:spPr>
+            <a:xfrm>
+              <a:off x="548640" y="1388609"/>
+              <a:ext cx="922351" cy="523220"/>
+            </a:xfrm>
+            <a:prstGeom prst="rect">
+              <a:avLst/>
+            </a:prstGeom>
+            <a:noFill/>
+          </p:spPr>
+          <p:txBody>
+            <a:bodyPr wrap="square" rtlCol="0">
+              <a:spAutoFit/>
+            </a:bodyPr>
+            <a:lstStyle/>
+            <a:p>
+              <a:r>
+                <a:rPr lang="en-US" sz="1400" dirty="0"/>
+                <a:t>Treated</a:t>
+              </a:r>
+            </a:p>
+            <a:p>
+              <a:r>
+                <a:rPr lang="en-US" sz="1400" dirty="0"/>
+                <a:t>Control</a:t>
+              </a:r>
+            </a:p>
+          </p:txBody>
+        </p:sp>
+      </p:grpSp>
+    </p:spTree>
+    <p:extLst>
+      <p:ext uri="{BB962C8B-B14F-4D97-AF65-F5344CB8AC3E}">
+        <p14:creationId xmlns:p14="http://schemas.microsoft.com/office/powerpoint/2010/main" val="198861114"/>
+      </p:ext>
+    </p:extLst>
+  </p:cSld>
+  <p:clrMapOvr>
+    <a:masterClrMapping/>
+  </p:clrMapOvr>
+</p:sld>
+</file>
+
+<file path=ppt/slides/slide13.xml><?xml version="1.0" encoding="utf-8"?>
+<p:sld xmlns:a="http://schemas.openxmlformats.org/drawingml/2006/main" xmlns:r="http://schemas.openxmlformats.org/officeDocument/2006/relationships" xmlns:p="http://schemas.openxmlformats.org/presentationml/2006/main">
+  <p:cSld>
+    <p:spTree>
+      <p:nvGrpSpPr>
+        <p:cNvPr id="1" name=""/>
+        <p:cNvGrpSpPr/>
+        <p:nvPr/>
+      </p:nvGrpSpPr>
+      <p:grpSpPr>
+        <a:xfrm>
+          <a:off x="0" y="0"/>
+          <a:ext cx="0" cy="0"/>
+          <a:chOff x="0" y="0"/>
+          <a:chExt cx="0" cy="0"/>
+        </a:xfrm>
+      </p:grpSpPr>
+      <p:sp>
+        <p:nvSpPr>
+          <p:cNvPr id="2" name="Title 1">
+            <a:extLst>
+              <a:ext uri="{FF2B5EF4-FFF2-40B4-BE49-F238E27FC236}">
+                <a16:creationId xmlns:a16="http://schemas.microsoft.com/office/drawing/2014/main" id="{EC048FDC-97C9-FA4A-AEE1-7799682A51FD}"/>
+              </a:ext>
+            </a:extLst>
+          </p:cNvPr>
+          <p:cNvSpPr>
+            <a:spLocks noGrp="1"/>
+          </p:cNvSpPr>
+          <p:nvPr>
+            <p:ph type="title"/>
+          </p:nvPr>
+        </p:nvSpPr>
+        <p:spPr/>
+        <p:txBody>
+          <a:bodyPr/>
+          <a:lstStyle/>
+          <a:p>
+            <a:r>
+              <a:rPr lang="en-US" dirty="0"/>
+              <a:t>Advanced Matching Methods </a:t>
+            </a:r>
+          </a:p>
+        </p:txBody>
+      </p:sp>
+      <p:sp>
+        <p:nvSpPr>
+          <p:cNvPr id="3" name="Rectangle 2">
+            <a:extLst>
+              <a:ext uri="{FF2B5EF4-FFF2-40B4-BE49-F238E27FC236}">
+                <a16:creationId xmlns:a16="http://schemas.microsoft.com/office/drawing/2014/main" id="{51D68B01-C236-CB48-9857-DD365318E67A}"/>
+              </a:ext>
+            </a:extLst>
+          </p:cNvPr>
+          <p:cNvSpPr/>
+          <p:nvPr/>
+        </p:nvSpPr>
+        <p:spPr>
+          <a:xfrm>
+            <a:off x="525199" y="1613118"/>
+            <a:ext cx="8161601" cy="4154984"/>
+          </a:xfrm>
+          <a:prstGeom prst="rect">
+            <a:avLst/>
+          </a:prstGeom>
+        </p:spPr>
+        <p:txBody>
+          <a:bodyPr wrap="square">
+            <a:spAutoFit/>
+          </a:bodyPr>
+          <a:lstStyle/>
+          <a:p>
+            <a:pPr marL="285750" indent="-285750">
+              <a:buFont typeface="Arial" panose="020B0604020202020204" pitchFamily="34" charset="0"/>
+              <a:buChar char="•"/>
+            </a:pPr>
+            <a:r>
+              <a:rPr lang="en-US" sz="2400" b="1" dirty="0"/>
+              <a:t>Kernel Matching / Weighting</a:t>
+            </a:r>
+          </a:p>
+          <a:p>
+            <a:pPr marL="742950" lvl="1" indent="-285750">
+              <a:buFont typeface="Arial" panose="020B0604020202020204" pitchFamily="34" charset="0"/>
+              <a:buChar char="•"/>
+            </a:pPr>
+            <a:r>
+              <a:rPr lang="en-US" sz="2400" dirty="0"/>
+              <a:t>Instead of matching pairs, assigns weights to all controls based on similarity </a:t>
+            </a:r>
+          </a:p>
+          <a:p>
+            <a:endParaRPr lang="en-US" sz="2400" b="1" dirty="0"/>
+          </a:p>
+          <a:p>
+            <a:pPr marL="342900" indent="-342900">
+              <a:buFont typeface="Arial" panose="020B0604020202020204" pitchFamily="34" charset="0"/>
+              <a:buChar char="•"/>
+            </a:pPr>
+            <a:r>
+              <a:rPr lang="en-US" sz="2400" b="1" dirty="0"/>
+              <a:t>Genetic Matching</a:t>
+            </a:r>
+          </a:p>
+          <a:p>
+            <a:pPr marL="800100" lvl="1" indent="-342900">
+              <a:buFont typeface="Arial" panose="020B0604020202020204" pitchFamily="34" charset="0"/>
+              <a:buChar char="•"/>
+            </a:pPr>
+            <a:r>
+              <a:rPr lang="en-US" sz="2400" dirty="0"/>
+              <a:t>Uses optimization algorithms to find the best balance across covariates </a:t>
+            </a:r>
+          </a:p>
+          <a:p>
+            <a:pPr marL="800100" lvl="1" indent="-342900">
+              <a:buFont typeface="Arial" panose="020B0604020202020204" pitchFamily="34" charset="0"/>
+              <a:buChar char="•"/>
+            </a:pPr>
+            <a:r>
+              <a:rPr lang="en-US" sz="2400" dirty="0"/>
+              <a:t>Iteratively improves matching quality </a:t>
+            </a:r>
+          </a:p>
+          <a:p>
+            <a:r>
+              <a:rPr lang="en-US" sz="2400" dirty="0"/>
+              <a:t>	✔ Very powerful</a:t>
+            </a:r>
+            <a:br>
+              <a:rPr lang="en-US" sz="2400" dirty="0"/>
+            </a:br>
+            <a:r>
+              <a:rPr lang="en-US" sz="2400" dirty="0"/>
+              <a:t>	✘ Computationally intensive</a:t>
+            </a:r>
+          </a:p>
+          <a:p>
+            <a:pPr lvl="1"/>
+            <a:endParaRPr lang="en-US" sz="2400" dirty="0"/>
+          </a:p>
+        </p:txBody>
+      </p:sp>
+    </p:spTree>
+    <p:extLst>
+      <p:ext uri="{BB962C8B-B14F-4D97-AF65-F5344CB8AC3E}">
+        <p14:creationId xmlns:p14="http://schemas.microsoft.com/office/powerpoint/2010/main" val="3465859146"/>
+      </p:ext>
+    </p:extLst>
+  </p:cSld>
+  <p:clrMapOvr>
+    <a:masterClrMapping/>
+  </p:clrMapOvr>
+</p:sld>
+</file>
+
+<file path=ppt/slides/slide14.xml><?xml version="1.0" encoding="utf-8"?>
 <p:sld xmlns:a="http://schemas.openxmlformats.org/drawingml/2006/main" xmlns:r="http://schemas.openxmlformats.org/officeDocument/2006/relationships" xmlns:p="http://schemas.openxmlformats.org/presentationml/2006/main">
   <p:cSld>
     <p:spTree>
@@ -5127,7 +5843,7 @@
     </p:spTree>
     <p:extLst>
       <p:ext uri="{BB962C8B-B14F-4D97-AF65-F5344CB8AC3E}">
-        <p14:creationId xmlns:p14="http://schemas.microsoft.com/office/powerpoint/2010/main" val="1319170026"/>
+        <p14:creationId xmlns:p14="http://schemas.microsoft.com/office/powerpoint/2010/main" val="4158416800"/>
       </p:ext>
     </p:extLst>
   </p:cSld>
@@ -5137,7 +5853,135 @@
 </p:sld>
 </file>
 
-<file path=ppt/slides/slide13.xml><?xml version="1.0" encoding="utf-8"?>
+<file path=ppt/slides/slide15.xml><?xml version="1.0" encoding="utf-8"?>
+<p:sld xmlns:a="http://schemas.openxmlformats.org/drawingml/2006/main" xmlns:r="http://schemas.openxmlformats.org/officeDocument/2006/relationships" xmlns:p="http://schemas.openxmlformats.org/presentationml/2006/main" show="0">
+  <p:cSld>
+    <p:spTree>
+      <p:nvGrpSpPr>
+        <p:cNvPr id="1" name=""/>
+        <p:cNvGrpSpPr/>
+        <p:nvPr/>
+      </p:nvGrpSpPr>
+      <p:grpSpPr>
+        <a:xfrm>
+          <a:off x="0" y="0"/>
+          <a:ext cx="0" cy="0"/>
+          <a:chOff x="0" y="0"/>
+          <a:chExt cx="0" cy="0"/>
+        </a:xfrm>
+      </p:grpSpPr>
+      <p:sp>
+        <p:nvSpPr>
+          <p:cNvPr id="2" name="Title 1"/>
+          <p:cNvSpPr>
+            <a:spLocks noGrp="1"/>
+          </p:cNvSpPr>
+          <p:nvPr>
+            <p:ph type="title"/>
+          </p:nvPr>
+        </p:nvSpPr>
+        <p:spPr/>
+        <p:txBody>
+          <a:bodyPr/>
+          <a:lstStyle/>
+          <a:p>
+            <a:r>
+              <a:t>Workflow</a:t>
+            </a:r>
+          </a:p>
+        </p:txBody>
+      </p:sp>
+      <p:sp>
+        <p:nvSpPr>
+          <p:cNvPr id="3" name="Content Placeholder 2"/>
+          <p:cNvSpPr>
+            <a:spLocks noGrp="1"/>
+          </p:cNvSpPr>
+          <p:nvPr>
+            <p:ph idx="1"/>
+          </p:nvPr>
+        </p:nvSpPr>
+        <p:spPr/>
+        <p:txBody>
+          <a:bodyPr/>
+          <a:lstStyle/>
+          <a:p>
+            <a:pPr marL="514350" indent="-514350">
+              <a:buFont typeface="+mj-lt"/>
+              <a:buAutoNum type="arabicPeriod"/>
+            </a:pPr>
+            <a:r>
+              <a:rPr dirty="0"/>
+              <a:t>Define treatment &amp; outcome</a:t>
+            </a:r>
+            <a:endParaRPr lang="en-US" dirty="0"/>
+          </a:p>
+          <a:p>
+            <a:pPr marL="514350" indent="-514350">
+              <a:buFont typeface="+mj-lt"/>
+              <a:buAutoNum type="arabicPeriod"/>
+            </a:pPr>
+            <a:r>
+              <a:rPr lang="en-US" dirty="0"/>
+              <a:t>Select covariates</a:t>
+            </a:r>
+          </a:p>
+          <a:p>
+            <a:pPr marL="514350" indent="-514350">
+              <a:buFont typeface="+mj-lt"/>
+              <a:buAutoNum type="arabicPeriod"/>
+            </a:pPr>
+            <a:r>
+              <a:rPr dirty="0"/>
+              <a:t>Estimate propensity scores</a:t>
+            </a:r>
+          </a:p>
+          <a:p>
+            <a:pPr marL="514350" indent="-514350">
+              <a:buFont typeface="+mj-lt"/>
+              <a:buAutoNum type="arabicPeriod"/>
+            </a:pPr>
+            <a:r>
+              <a:rPr dirty="0"/>
+              <a:t>Match</a:t>
+            </a:r>
+          </a:p>
+          <a:p>
+            <a:pPr marL="514350" indent="-514350">
+              <a:buFont typeface="+mj-lt"/>
+              <a:buAutoNum type="arabicPeriod"/>
+            </a:pPr>
+            <a:r>
+              <a:rPr u="sng" dirty="0"/>
+              <a:t>Check balance</a:t>
+            </a:r>
+          </a:p>
+          <a:p>
+            <a:pPr marL="514350" indent="-514350">
+              <a:buFont typeface="+mj-lt"/>
+              <a:buAutoNum type="arabicPeriod"/>
+            </a:pPr>
+            <a:r>
+              <a:rPr dirty="0"/>
+              <a:t>Estimate effect</a:t>
+            </a:r>
+          </a:p>
+        </p:txBody>
+      </p:sp>
+    </p:spTree>
+    <p:extLst>
+      <p:ext uri="{BB962C8B-B14F-4D97-AF65-F5344CB8AC3E}">
+        <p14:creationId xmlns:p14="http://schemas.microsoft.com/office/powerpoint/2010/main" val="3425976946"/>
+      </p:ext>
+    </p:extLst>
+  </p:cSld>
+  <p:clrMapOvr>
+    <a:masterClrMapping/>
+  </p:clrMapOvr>
+</p:sld>
+</file>
+
+<file path=ppt/slides/slide16.xml><?xml version="1.0" encoding="utf-8"?>
 <p:sld xmlns:a="http://schemas.openxmlformats.org/drawingml/2006/main" xmlns:r="http://schemas.openxmlformats.org/officeDocument/2006/relationships" xmlns:p="http://schemas.openxmlformats.org/presentationml/2006/main">
   <p:cSld>
     <p:spTree>
@@ -5156,129 +6000,6 @@
       </p:grpSpPr>
       <p:sp>
         <p:nvSpPr>
-          <p:cNvPr id="2" name="Title 1"/>
-          <p:cNvSpPr>
-            <a:spLocks noGrp="1"/>
-          </p:cNvSpPr>
-          <p:nvPr>
-            <p:ph type="title"/>
-          </p:nvPr>
-        </p:nvSpPr>
-        <p:spPr/>
-        <p:txBody>
-          <a:bodyPr/>
-          <a:lstStyle/>
-          <a:p>
-            <a:r>
-              <a:t>Workflow</a:t>
-            </a:r>
-          </a:p>
-        </p:txBody>
-      </p:sp>
-      <p:sp>
-        <p:nvSpPr>
-          <p:cNvPr id="3" name="Content Placeholder 2"/>
-          <p:cNvSpPr>
-            <a:spLocks noGrp="1"/>
-          </p:cNvSpPr>
-          <p:nvPr>
-            <p:ph idx="1"/>
-          </p:nvPr>
-        </p:nvSpPr>
-        <p:spPr/>
-        <p:txBody>
-          <a:bodyPr/>
-          <a:lstStyle/>
-          <a:p>
-            <a:pPr marL="514350" indent="-514350">
-              <a:buFont typeface="+mj-lt"/>
-              <a:buAutoNum type="arabicPeriod"/>
-            </a:pPr>
-            <a:r>
-              <a:rPr dirty="0"/>
-              <a:t>Define treatment &amp; outcome</a:t>
-            </a:r>
-            <a:endParaRPr lang="en-US" dirty="0"/>
-          </a:p>
-          <a:p>
-            <a:pPr marL="514350" indent="-514350">
-              <a:buFont typeface="+mj-lt"/>
-              <a:buAutoNum type="arabicPeriod"/>
-            </a:pPr>
-            <a:r>
-              <a:rPr lang="en-US" dirty="0"/>
-              <a:t>Select covariates</a:t>
-            </a:r>
-          </a:p>
-          <a:p>
-            <a:pPr marL="514350" indent="-514350">
-              <a:buFont typeface="+mj-lt"/>
-              <a:buAutoNum type="arabicPeriod"/>
-            </a:pPr>
-            <a:r>
-              <a:rPr dirty="0"/>
-              <a:t>Estimate propensity scores</a:t>
-            </a:r>
-          </a:p>
-          <a:p>
-            <a:pPr marL="514350" indent="-514350">
-              <a:buFont typeface="+mj-lt"/>
-              <a:buAutoNum type="arabicPeriod"/>
-            </a:pPr>
-            <a:r>
-              <a:rPr dirty="0"/>
-              <a:t>Match</a:t>
-            </a:r>
-          </a:p>
-          <a:p>
-            <a:pPr marL="514350" indent="-514350">
-              <a:buFont typeface="+mj-lt"/>
-              <a:buAutoNum type="arabicPeriod"/>
-            </a:pPr>
-            <a:r>
-              <a:rPr u="sng" dirty="0"/>
-              <a:t>Check balance</a:t>
-            </a:r>
-          </a:p>
-          <a:p>
-            <a:pPr marL="514350" indent="-514350">
-              <a:buFont typeface="+mj-lt"/>
-              <a:buAutoNum type="arabicPeriod"/>
-            </a:pPr>
-            <a:r>
-              <a:rPr dirty="0"/>
-              <a:t>Estimate effect</a:t>
-            </a:r>
-          </a:p>
-        </p:txBody>
-      </p:sp>
-    </p:spTree>
-  </p:cSld>
-  <p:clrMapOvr>
-    <a:masterClrMapping/>
-  </p:clrMapOvr>
-</p:sld>
-</file>
-
-<file path=ppt/slides/slide14.xml><?xml version="1.0" encoding="utf-8"?>
-<p:sld xmlns:a="http://schemas.openxmlformats.org/drawingml/2006/main" xmlns:r="http://schemas.openxmlformats.org/officeDocument/2006/relationships" xmlns:p="http://schemas.openxmlformats.org/presentationml/2006/main">
-  <p:cSld>
-    <p:spTree>
-      <p:nvGrpSpPr>
-        <p:cNvPr id="1" name=""/>
-        <p:cNvGrpSpPr/>
-        <p:nvPr/>
-      </p:nvGrpSpPr>
-      <p:grpSpPr>
-        <a:xfrm>
-          <a:off x="0" y="0"/>
-          <a:ext cx="0" cy="0"/>
-          <a:chOff x="0" y="0"/>
-          <a:chExt cx="0" cy="0"/>
-        </a:xfrm>
-      </p:grpSpPr>
-      <p:sp>
-        <p:nvSpPr>
           <p:cNvPr id="2" name="Title 1">
             <a:extLst>
               <a:ext uri="{FF2B5EF4-FFF2-40B4-BE49-F238E27FC236}">
@@ -5320,11 +6041,7 @@
             <a:graphicFrameLocks noGrp="1"/>
           </p:cNvGraphicFramePr>
           <p:nvPr>
-            <p:extLst>
-              <p:ext uri="{D42A27DB-BD31-4B8C-83A1-F6EECF244321}">
-                <p14:modId xmlns:p14="http://schemas.microsoft.com/office/powerpoint/2010/main" val="1265740676"/>
-              </p:ext>
-            </p:extLst>
+            <p:extLst/>
           </p:nvPr>
         </p:nvGraphicFramePr>
         <p:xfrm>
@@ -6348,7 +7065,7 @@
     </p:spTree>
     <p:extLst>
       <p:ext uri="{BB962C8B-B14F-4D97-AF65-F5344CB8AC3E}">
-        <p14:creationId xmlns:p14="http://schemas.microsoft.com/office/powerpoint/2010/main" val="2271375973"/>
+        <p14:creationId xmlns:p14="http://schemas.microsoft.com/office/powerpoint/2010/main" val="3879160059"/>
       </p:ext>
     </p:extLst>
   </p:cSld>
@@ -6358,7 +7075,7 @@
 </p:sld>
 </file>
 
-<file path=ppt/slides/slide15.xml><?xml version="1.0" encoding="utf-8"?>
+<file path=ppt/slides/slide17.xml><?xml version="1.0" encoding="utf-8"?>
 <p:sld xmlns:a="http://schemas.openxmlformats.org/drawingml/2006/main" xmlns:r="http://schemas.openxmlformats.org/officeDocument/2006/relationships" xmlns:p="http://schemas.openxmlformats.org/presentationml/2006/main">
   <p:cSld>
     <p:spTree>
@@ -6437,6 +7154,11 @@
         </p:txBody>
       </p:sp>
     </p:spTree>
+    <p:extLst>
+      <p:ext uri="{BB962C8B-B14F-4D97-AF65-F5344CB8AC3E}">
+        <p14:creationId xmlns:p14="http://schemas.microsoft.com/office/powerpoint/2010/main" val="3554609526"/>
+      </p:ext>
+    </p:extLst>
   </p:cSld>
   <p:clrMapOvr>
     <a:masterClrMapping/>
@@ -6444,7 +7166,7 @@
 </p:sld>
 </file>
 
-<file path=ppt/slides/slide16.xml><?xml version="1.0" encoding="utf-8"?>
+<file path=ppt/slides/slide18.xml><?xml version="1.0" encoding="utf-8"?>
 <p:sld xmlns:a="http://schemas.openxmlformats.org/drawingml/2006/main" xmlns:r="http://schemas.openxmlformats.org/officeDocument/2006/relationships" xmlns:p="http://schemas.openxmlformats.org/presentationml/2006/main">
   <p:cSld>
     <p:spTree>
@@ -6517,6 +7239,203 @@
         </p:txBody>
       </p:sp>
     </p:spTree>
+    <p:extLst>
+      <p:ext uri="{BB962C8B-B14F-4D97-AF65-F5344CB8AC3E}">
+        <p14:creationId xmlns:p14="http://schemas.microsoft.com/office/powerpoint/2010/main" val="4000030500"/>
+      </p:ext>
+    </p:extLst>
+  </p:cSld>
+  <p:clrMapOvr>
+    <a:masterClrMapping/>
+  </p:clrMapOvr>
+</p:sld>
+</file>
+
+<file path=ppt/slides/slide19.xml><?xml version="1.0" encoding="utf-8"?>
+<p:sld xmlns:a="http://schemas.openxmlformats.org/drawingml/2006/main" xmlns:r="http://schemas.openxmlformats.org/officeDocument/2006/relationships" xmlns:p="http://schemas.openxmlformats.org/presentationml/2006/main" show="0">
+  <p:cSld>
+    <p:spTree>
+      <p:nvGrpSpPr>
+        <p:cNvPr id="1" name=""/>
+        <p:cNvGrpSpPr/>
+        <p:nvPr/>
+      </p:nvGrpSpPr>
+      <p:grpSpPr>
+        <a:xfrm>
+          <a:off x="0" y="0"/>
+          <a:ext cx="0" cy="0"/>
+          <a:chOff x="0" y="0"/>
+          <a:chExt cx="0" cy="0"/>
+        </a:xfrm>
+      </p:grpSpPr>
+      <p:sp>
+        <p:nvSpPr>
+          <p:cNvPr id="2" name="Title 1">
+            <a:extLst>
+              <a:ext uri="{FF2B5EF4-FFF2-40B4-BE49-F238E27FC236}">
+                <a16:creationId xmlns:a16="http://schemas.microsoft.com/office/drawing/2014/main" id="{346C232A-54BA-3C44-9D49-1DB7B5C9D6C2}"/>
+              </a:ext>
+            </a:extLst>
+          </p:cNvPr>
+          <p:cNvSpPr>
+            <a:spLocks noGrp="1"/>
+          </p:cNvSpPr>
+          <p:nvPr>
+            <p:ph type="title"/>
+          </p:nvPr>
+        </p:nvSpPr>
+        <p:spPr/>
+        <p:txBody>
+          <a:bodyPr>
+            <a:normAutofit/>
+          </a:bodyPr>
+          <a:lstStyle/>
+          <a:p>
+            <a:r>
+              <a:rPr lang="en-US" b="1" dirty="0"/>
+              <a:t>Setup for today’s exercise</a:t>
+            </a:r>
+          </a:p>
+        </p:txBody>
+      </p:sp>
+      <p:sp>
+        <p:nvSpPr>
+          <p:cNvPr id="7" name="Rectangle 6">
+            <a:extLst>
+              <a:ext uri="{FF2B5EF4-FFF2-40B4-BE49-F238E27FC236}">
+                <a16:creationId xmlns:a16="http://schemas.microsoft.com/office/drawing/2014/main" id="{A2968D5C-DF8F-B24B-B5C1-104CEBBD4799}"/>
+              </a:ext>
+            </a:extLst>
+          </p:cNvPr>
+          <p:cNvSpPr/>
+          <p:nvPr/>
+        </p:nvSpPr>
+        <p:spPr>
+          <a:xfrm>
+            <a:off x="619312" y="1417638"/>
+            <a:ext cx="7274112" cy="3046988"/>
+          </a:xfrm>
+          <a:prstGeom prst="rect">
+            <a:avLst/>
+          </a:prstGeom>
+        </p:spPr>
+        <p:txBody>
+          <a:bodyPr wrap="square">
+            <a:spAutoFit/>
+          </a:bodyPr>
+          <a:lstStyle/>
+          <a:p>
+            <a:pPr marL="457200" indent="-457200">
+              <a:buAutoNum type="arabicPeriod"/>
+            </a:pPr>
+            <a:r>
+              <a:rPr lang="en-US" sz="2400" b="1" dirty="0"/>
+              <a:t>Install </a:t>
+            </a:r>
+            <a:r>
+              <a:rPr lang="en-US" sz="2400" b="1" dirty="0" err="1"/>
+              <a:t>RStudio</a:t>
+            </a:r>
+            <a:endParaRPr lang="en-US" sz="2400" b="1" dirty="0"/>
+          </a:p>
+          <a:p>
+            <a:r>
+              <a:rPr lang="en-US" sz="2400" dirty="0"/>
+              <a:t>	Go to </a:t>
+            </a:r>
+            <a:r>
+              <a:rPr lang="en-US" sz="2400" dirty="0">
+                <a:hlinkClick r:id="rId3"/>
+              </a:rPr>
+              <a:t>https://posit.co/download/rstudio-desktop#download</a:t>
+            </a:r>
+            <a:r>
+              <a:rPr lang="en-US" sz="2400" dirty="0"/>
+              <a:t> and follow step #2</a:t>
+            </a:r>
+          </a:p>
+          <a:p>
+            <a:endParaRPr lang="en-US" sz="2400" dirty="0"/>
+          </a:p>
+          <a:p>
+            <a:r>
+              <a:rPr lang="en-US" sz="2400" b="1" dirty="0"/>
+              <a:t>2. Open </a:t>
+            </a:r>
+            <a:r>
+              <a:rPr lang="en-US" sz="2400" b="1" dirty="0" err="1"/>
+              <a:t>RStudio</a:t>
+            </a:r>
+            <a:r>
+              <a:rPr lang="en-US" sz="2400" b="1" dirty="0"/>
+              <a:t> and install </a:t>
+            </a:r>
+            <a:r>
+              <a:rPr lang="en-US" sz="2400" dirty="0"/>
+              <a:t>the required packages with the following line of code:</a:t>
+            </a:r>
+          </a:p>
+          <a:p>
+            <a:endParaRPr lang="en-US" sz="2400" dirty="0"/>
+          </a:p>
+          <a:p>
+            <a:r>
+              <a:rPr lang="en-US" sz="2400" dirty="0" err="1">
+                <a:solidFill>
+                  <a:schemeClr val="tx2"/>
+                </a:solidFill>
+              </a:rPr>
+              <a:t>install.packages</a:t>
+            </a:r>
+            <a:r>
+              <a:rPr lang="en-US" sz="2400" dirty="0">
+                <a:solidFill>
+                  <a:schemeClr val="tx2"/>
+                </a:solidFill>
+              </a:rPr>
+              <a:t>(c('</a:t>
+            </a:r>
+            <a:r>
+              <a:rPr lang="en-US" sz="2400" dirty="0" err="1">
+                <a:solidFill>
+                  <a:schemeClr val="tx2"/>
+                </a:solidFill>
+              </a:rPr>
+              <a:t>tidyverse</a:t>
+            </a:r>
+            <a:r>
+              <a:rPr lang="en-US" sz="2400" dirty="0">
+                <a:solidFill>
+                  <a:schemeClr val="tx2"/>
+                </a:solidFill>
+              </a:rPr>
+              <a:t>', '</a:t>
+            </a:r>
+            <a:r>
+              <a:rPr lang="en-US" sz="2400" dirty="0" err="1">
+                <a:solidFill>
+                  <a:schemeClr val="tx2"/>
+                </a:solidFill>
+              </a:rPr>
+              <a:t>MatchIt</a:t>
+            </a:r>
+            <a:r>
+              <a:rPr lang="en-US" sz="2400" dirty="0">
+                <a:solidFill>
+                  <a:schemeClr val="tx2"/>
+                </a:solidFill>
+              </a:rPr>
+              <a:t>', 'cobalt'))</a:t>
+            </a:r>
+          </a:p>
+        </p:txBody>
+      </p:sp>
+    </p:spTree>
+    <p:extLst>
+      <p:ext uri="{BB962C8B-B14F-4D97-AF65-F5344CB8AC3E}">
+        <p14:creationId xmlns:p14="http://schemas.microsoft.com/office/powerpoint/2010/main" val="15900368"/>
+      </p:ext>
+    </p:extLst>
   </p:cSld>
   <p:clrMapOvr>
     <a:masterClrMapping/>
@@ -6638,7 +7557,7 @@
             <a:pPr lvl="1"/>
             <a:r>
               <a:rPr lang="en-US" dirty="0"/>
-              <a:t>Randomized trial ≠ Observational data</a:t>
+              <a:t>Randomized controlled trial ≠ Observational data</a:t>
             </a:r>
           </a:p>
           <a:p>
@@ -6664,16 +7583,78 @@
           </p:cNvPicPr>
           <p:nvPr/>
         </p:nvPicPr>
-        <p:blipFill>
+        <p:blipFill rotWithShape="1">
           <a:blip r:embed="rId3"/>
-          <a:stretch>
-            <a:fillRect/>
-          </a:stretch>
+          <a:srcRect t="19790" r="14425"/>
+          <a:stretch/>
         </p:blipFill>
         <p:spPr>
           <a:xfrm>
-            <a:off x="457200" y="4772680"/>
-            <a:ext cx="8323729" cy="1530645"/>
+            <a:off x="1683706" y="5229381"/>
+            <a:ext cx="7123043" cy="1227742"/>
+          </a:xfrm>
+          <a:prstGeom prst="rect">
+            <a:avLst/>
+          </a:prstGeom>
+        </p:spPr>
+      </p:pic>
+      <p:sp>
+        <p:nvSpPr>
+          <p:cNvPr id="4" name="Rectangle 3">
+            <a:extLst>
+              <a:ext uri="{FF2B5EF4-FFF2-40B4-BE49-F238E27FC236}">
+                <a16:creationId xmlns:a16="http://schemas.microsoft.com/office/drawing/2014/main" id="{17CC20AC-36B7-814B-A0F7-F59DD1355F0C}"/>
+              </a:ext>
+            </a:extLst>
+          </p:cNvPr>
+          <p:cNvSpPr/>
+          <p:nvPr/>
+        </p:nvSpPr>
+        <p:spPr>
+          <a:xfrm>
+            <a:off x="457200" y="4706251"/>
+            <a:ext cx="3831818" cy="369332"/>
+          </a:xfrm>
+          <a:prstGeom prst="rect">
+            <a:avLst/>
+          </a:prstGeom>
+        </p:spPr>
+        <p:txBody>
+          <a:bodyPr wrap="none">
+            <a:spAutoFit/>
+          </a:bodyPr>
+          <a:lstStyle/>
+          <a:p>
+            <a:r>
+              <a:rPr lang="en-US" b="1" dirty="0"/>
+              <a:t>Treatment assignment is not random.</a:t>
+            </a:r>
+          </a:p>
+        </p:txBody>
+      </p:sp>
+      <p:pic>
+        <p:nvPicPr>
+          <p:cNvPr id="7" name="Picture 6">
+            <a:extLst>
+              <a:ext uri="{FF2B5EF4-FFF2-40B4-BE49-F238E27FC236}">
+                <a16:creationId xmlns:a16="http://schemas.microsoft.com/office/drawing/2014/main" id="{6F6E95B7-85CE-ED4E-B3B2-5C2B632C146D}"/>
+              </a:ext>
+            </a:extLst>
+          </p:cNvPr>
+          <p:cNvPicPr>
+            <a:picLocks noChangeAspect="1"/>
+          </p:cNvPicPr>
+          <p:nvPr/>
+        </p:nvPicPr>
+        <p:blipFill rotWithShape="1">
+          <a:blip r:embed="rId3"/>
+          <a:srcRect l="85345" t="19790"/>
+          <a:stretch/>
+        </p:blipFill>
+        <p:spPr>
+          <a:xfrm>
+            <a:off x="457200" y="5303666"/>
+            <a:ext cx="1219881" cy="1227742"/>
           </a:xfrm>
           <a:prstGeom prst="rect">
             <a:avLst/>
@@ -6694,7 +7675,7 @@
         </p:nvSpPr>
         <p:spPr>
           <a:xfrm>
-            <a:off x="330868" y="4033091"/>
+            <a:off x="128088" y="4019472"/>
             <a:ext cx="8678661" cy="2568388"/>
           </a:xfrm>
           <a:prstGeom prst="rect">
@@ -6728,6 +7709,11 @@
         </p:txBody>
       </p:sp>
     </p:spTree>
+    <p:extLst>
+      <p:ext uri="{BB962C8B-B14F-4D97-AF65-F5344CB8AC3E}">
+        <p14:creationId xmlns:p14="http://schemas.microsoft.com/office/powerpoint/2010/main" val="1036190574"/>
+      </p:ext>
+    </p:extLst>
   </p:cSld>
   <p:clrMapOvr>
     <a:masterClrMapping/>
@@ -6983,7 +7969,7 @@
     </p:spTree>
     <p:extLst>
       <p:ext uri="{BB962C8B-B14F-4D97-AF65-F5344CB8AC3E}">
-        <p14:creationId xmlns:p14="http://schemas.microsoft.com/office/powerpoint/2010/main" val="107552851"/>
+        <p14:creationId xmlns:p14="http://schemas.microsoft.com/office/powerpoint/2010/main" val="617295121"/>
       </p:ext>
     </p:extLst>
   </p:cSld>
@@ -7241,6 +8227,11 @@
         </p:spPr>
       </p:pic>
     </p:spTree>
+    <p:extLst>
+      <p:ext uri="{BB962C8B-B14F-4D97-AF65-F5344CB8AC3E}">
+        <p14:creationId xmlns:p14="http://schemas.microsoft.com/office/powerpoint/2010/main" val="3277431016"/>
+      </p:ext>
+    </p:extLst>
   </p:cSld>
   <p:clrMapOvr>
     <a:masterClrMapping/>
@@ -7305,7 +8296,7 @@
         <p:spPr/>
         <p:txBody>
           <a:bodyPr>
-            <a:normAutofit lnSpcReduction="10000"/>
+            <a:normAutofit/>
           </a:bodyPr>
           <a:lstStyle/>
           <a:p>
@@ -7321,7 +8312,38 @@
               <a:rPr lang="en-US" sz="2400" dirty="0"/>
               <a:t>Same age/severity/comorbidities</a:t>
             </a:r>
-            <a:endParaRPr sz="2400" dirty="0"/>
+            <a:endParaRPr lang="en-US" sz="2800" dirty="0"/>
+          </a:p>
+          <a:p>
+            <a:r>
+              <a:rPr lang="en-US" sz="2800" dirty="0"/>
+              <a:t>Coarsened Exact Matching (CEM)</a:t>
+            </a:r>
+          </a:p>
+          <a:p>
+            <a:pPr lvl="1"/>
+            <a:r>
+              <a:rPr lang="en-US" sz="2400" dirty="0"/>
+              <a:t>Groups variables into bins</a:t>
+            </a:r>
+          </a:p>
+          <a:p>
+            <a:pPr lvl="1"/>
+            <a:r>
+              <a:rPr lang="en-US" sz="2400" dirty="0"/>
+              <a:t>Performs exact matching on those bins</a:t>
+            </a:r>
+          </a:p>
+          <a:p>
+            <a:pPr lvl="1"/>
+            <a:r>
+              <a:rPr lang="en-US" sz="2400" dirty="0"/>
+              <a:t>Ex. age 30–40 instead of exact age</a:t>
+            </a:r>
+          </a:p>
+          <a:p>
+            <a:pPr lvl="1"/>
+            <a:endParaRPr lang="en-US" sz="2400" dirty="0"/>
           </a:p>
           <a:p>
             <a:pPr marL="400050" lvl="1" indent="0">
@@ -7330,14 +8352,12 @@
             <a:r>
               <a:rPr lang="en-US" sz="2400" dirty="0">
                 <a:solidFill>
-                  <a:schemeClr val="accent1"/>
+                  <a:schemeClr val="accent3">
+                    <a:lumMod val="50000"/>
+                  </a:schemeClr>
                 </a:solidFill>
               </a:rPr>
-              <a:t>✔</a:t>
-            </a:r>
-            <a:r>
-              <a:rPr lang="en-US" sz="2400" dirty="0"/>
-              <a:t>  Very interpretable</a:t>
+              <a:t>✔  Very interpretable</a:t>
             </a:r>
           </a:p>
           <a:p>
@@ -7345,54 +8365,28 @@
               <a:buNone/>
             </a:pPr>
             <a:r>
-              <a:rPr lang="en-US" sz="2400" dirty="0"/>
-              <a:t>✘ </a:t>
-            </a:r>
-            <a:r>
-              <a:rPr sz="2400" dirty="0"/>
-              <a:t>Often </a:t>
-            </a:r>
-            <a:r>
-              <a:rPr lang="en-US" sz="2400" dirty="0"/>
-              <a:t>impractical with many variables (data becomes sparse)</a:t>
-            </a:r>
-          </a:p>
-          <a:p>
-            <a:pPr marL="0" indent="0">
+              <a:rPr lang="en-US" sz="2400" dirty="0">
+                <a:solidFill>
+                  <a:schemeClr val="accent2"/>
+                </a:solidFill>
+              </a:rPr>
+              <a:t>✘ Often impractical with many variables (data becomes sparse)</a:t>
+            </a:r>
+          </a:p>
+          <a:p>
+            <a:pPr marL="457200" lvl="1" indent="0">
               <a:buNone/>
             </a:pPr>
-            <a:endParaRPr lang="en-US" sz="2800" dirty="0"/>
-          </a:p>
-          <a:p>
-            <a:r>
-              <a:rPr lang="en-US" sz="2800" dirty="0"/>
-              <a:t>Coarsened Exact Matching (CEM)</a:t>
-            </a:r>
-          </a:p>
-          <a:p>
-            <a:pPr lvl="1"/>
-            <a:r>
-              <a:rPr lang="en-US" sz="2400" dirty="0"/>
-              <a:t>Groups variables into bins</a:t>
-            </a:r>
-          </a:p>
-          <a:p>
-            <a:pPr lvl="1"/>
-            <a:r>
-              <a:rPr lang="en-US" sz="2400" dirty="0"/>
-              <a:t>Performs exact matching on those bins</a:t>
-            </a:r>
-          </a:p>
-          <a:p>
-            <a:pPr lvl="1"/>
-            <a:r>
-              <a:rPr lang="en-US" sz="2400" dirty="0"/>
-              <a:t>Ex. age 30–40 instead of exact age</a:t>
-            </a:r>
+            <a:endParaRPr lang="en-US" sz="2400" dirty="0"/>
           </a:p>
         </p:txBody>
       </p:sp>
     </p:spTree>
+    <p:extLst>
+      <p:ext uri="{BB962C8B-B14F-4D97-AF65-F5344CB8AC3E}">
+        <p14:creationId xmlns:p14="http://schemas.microsoft.com/office/powerpoint/2010/main" val="1510513879"/>
+      </p:ext>
+    </p:extLst>
   </p:cSld>
   <p:clrMapOvr>
     <a:masterClrMapping/>
@@ -7429,12 +8423,14 @@
         </p:nvSpPr>
         <p:spPr/>
         <p:txBody>
-          <a:bodyPr/>
-          <a:lstStyle/>
-          <a:p>
-            <a:r>
-              <a:rPr dirty="0"/>
-              <a:t>Propensity Score Matching</a:t>
+          <a:bodyPr>
+            <a:normAutofit fontScale="90000"/>
+          </a:bodyPr>
+          <a:lstStyle/>
+          <a:p>
+            <a:r>
+              <a:rPr lang="en-US" dirty="0"/>
+              <a:t>Matching methods have four key steps</a:t>
             </a:r>
           </a:p>
         </p:txBody>
@@ -7449,57 +8445,72 @@
             <p:ph idx="1"/>
           </p:nvPr>
         </p:nvSpPr>
-        <p:spPr/>
+        <p:spPr>
+          <a:xfrm>
+            <a:off x="1060174" y="1798983"/>
+            <a:ext cx="7348330" cy="4525963"/>
+          </a:xfrm>
+        </p:spPr>
         <p:txBody>
           <a:bodyPr>
             <a:normAutofit/>
           </a:bodyPr>
           <a:lstStyle/>
           <a:p>
+            <a:pPr marL="514350" indent="-514350">
+              <a:buAutoNum type="arabicPeriod"/>
+            </a:pPr>
             <a:r>
               <a:rPr lang="en-US" dirty="0"/>
-              <a:t>The probability that a patient receives treatment, given their characteristics</a:t>
-            </a:r>
-          </a:p>
-          <a:p>
+              <a:t>Defining a </a:t>
+            </a:r>
+            <a:r>
+              <a:rPr lang="en-US" b="1" dirty="0"/>
+              <a:t>distance measure </a:t>
+            </a:r>
+          </a:p>
+          <a:p>
+            <a:pPr marL="514350" indent="-514350">
+              <a:buAutoNum type="arabicPeriod"/>
+            </a:pPr>
             <a:r>
               <a:rPr lang="en-US" dirty="0"/>
-              <a:t>Logistic regression</a:t>
-            </a:r>
-          </a:p>
-        </p:txBody>
-      </p:sp>
-      <p:pic>
-        <p:nvPicPr>
-          <p:cNvPr id="4" name="Picture 3">
-            <a:extLst>
-              <a:ext uri="{FF2B5EF4-FFF2-40B4-BE49-F238E27FC236}">
-                <a16:creationId xmlns:a16="http://schemas.microsoft.com/office/drawing/2014/main" id="{A8532AC5-E938-B744-865F-9D8984116488}"/>
-              </a:ext>
-            </a:extLst>
-          </p:cNvPr>
-          <p:cNvPicPr>
-            <a:picLocks noChangeAspect="1"/>
-          </p:cNvPicPr>
-          <p:nvPr/>
-        </p:nvPicPr>
-        <p:blipFill>
-          <a:blip r:embed="rId3"/>
-          <a:stretch>
-            <a:fillRect/>
-          </a:stretch>
-        </p:blipFill>
-        <p:spPr>
-          <a:xfrm>
-            <a:off x="1854200" y="3429000"/>
-            <a:ext cx="5435600" cy="2730500"/>
-          </a:xfrm>
-          <a:prstGeom prst="rect">
-            <a:avLst/>
-          </a:prstGeom>
-        </p:spPr>
-      </p:pic>
+              <a:t>Implementing a matching method given that measure of closeness</a:t>
+            </a:r>
+          </a:p>
+          <a:p>
+            <a:pPr marL="514350" indent="-514350">
+              <a:buAutoNum type="arabicPeriod"/>
+            </a:pPr>
+            <a:r>
+              <a:rPr lang="en-US" dirty="0"/>
+              <a:t>Assessing the quality of the resulting matched samples</a:t>
+            </a:r>
+          </a:p>
+          <a:p>
+            <a:pPr marL="514350" indent="-514350">
+              <a:buAutoNum type="arabicPeriod"/>
+            </a:pPr>
+            <a:r>
+              <a:rPr lang="en-US" dirty="0"/>
+              <a:t>Analysis of the outcome of the treatment effect</a:t>
+            </a:r>
+          </a:p>
+          <a:p>
+            <a:pPr marL="914400" lvl="1" indent="-457200">
+              <a:buFont typeface="+mj-lt"/>
+              <a:buAutoNum type="arabicPeriod"/>
+            </a:pPr>
+            <a:endParaRPr lang="en-US" sz="2400" dirty="0"/>
+          </a:p>
+        </p:txBody>
+      </p:sp>
     </p:spTree>
+    <p:extLst>
+      <p:ext uri="{BB962C8B-B14F-4D97-AF65-F5344CB8AC3E}">
+        <p14:creationId xmlns:p14="http://schemas.microsoft.com/office/powerpoint/2010/main" val="2765407779"/>
+      </p:ext>
+    </p:extLst>
   </p:cSld>
   <p:clrMapOvr>
     <a:masterClrMapping/>
@@ -7526,6 +8537,118 @@
       </p:grpSpPr>
       <p:sp>
         <p:nvSpPr>
+          <p:cNvPr id="2" name="Title 1"/>
+          <p:cNvSpPr>
+            <a:spLocks noGrp="1"/>
+          </p:cNvSpPr>
+          <p:nvPr>
+            <p:ph type="title"/>
+          </p:nvPr>
+        </p:nvSpPr>
+        <p:spPr/>
+        <p:txBody>
+          <a:bodyPr/>
+          <a:lstStyle/>
+          <a:p>
+            <a:r>
+              <a:rPr dirty="0"/>
+              <a:t>Propensity Score Matching</a:t>
+            </a:r>
+          </a:p>
+        </p:txBody>
+      </p:sp>
+      <p:sp>
+        <p:nvSpPr>
+          <p:cNvPr id="3" name="Content Placeholder 2"/>
+          <p:cNvSpPr>
+            <a:spLocks noGrp="1"/>
+          </p:cNvSpPr>
+          <p:nvPr>
+            <p:ph idx="1"/>
+          </p:nvPr>
+        </p:nvSpPr>
+        <p:spPr/>
+        <p:txBody>
+          <a:bodyPr>
+            <a:normAutofit/>
+          </a:bodyPr>
+          <a:lstStyle/>
+          <a:p>
+            <a:r>
+              <a:rPr lang="en-US" dirty="0"/>
+              <a:t>The probability that a patient receives treatment, given their characteristics</a:t>
+            </a:r>
+          </a:p>
+          <a:p>
+            <a:r>
+              <a:rPr lang="en-US" dirty="0"/>
+              <a:t>Logistic regression</a:t>
+            </a:r>
+          </a:p>
+        </p:txBody>
+      </p:sp>
+      <p:pic>
+        <p:nvPicPr>
+          <p:cNvPr id="4" name="Picture 3">
+            <a:extLst>
+              <a:ext uri="{FF2B5EF4-FFF2-40B4-BE49-F238E27FC236}">
+                <a16:creationId xmlns:a16="http://schemas.microsoft.com/office/drawing/2014/main" id="{A8532AC5-E938-B744-865F-9D8984116488}"/>
+              </a:ext>
+            </a:extLst>
+          </p:cNvPr>
+          <p:cNvPicPr>
+            <a:picLocks noChangeAspect="1"/>
+          </p:cNvPicPr>
+          <p:nvPr/>
+        </p:nvPicPr>
+        <p:blipFill>
+          <a:blip r:embed="rId3"/>
+          <a:stretch>
+            <a:fillRect/>
+          </a:stretch>
+        </p:blipFill>
+        <p:spPr>
+          <a:xfrm>
+            <a:off x="1854200" y="3578225"/>
+            <a:ext cx="5435600" cy="2730500"/>
+          </a:xfrm>
+          <a:prstGeom prst="rect">
+            <a:avLst/>
+          </a:prstGeom>
+        </p:spPr>
+      </p:pic>
+    </p:spTree>
+    <p:extLst>
+      <p:ext uri="{BB962C8B-B14F-4D97-AF65-F5344CB8AC3E}">
+        <p14:creationId xmlns:p14="http://schemas.microsoft.com/office/powerpoint/2010/main" val="2421017342"/>
+      </p:ext>
+    </p:extLst>
+  </p:cSld>
+  <p:clrMapOvr>
+    <a:masterClrMapping/>
+  </p:clrMapOvr>
+</p:sld>
+</file>
+
+<file path=ppt/slides/slide8.xml><?xml version="1.0" encoding="utf-8"?>
+<p:sld xmlns:a="http://schemas.openxmlformats.org/drawingml/2006/main" xmlns:r="http://schemas.openxmlformats.org/officeDocument/2006/relationships" xmlns:p="http://schemas.openxmlformats.org/presentationml/2006/main">
+  <p:cSld>
+    <p:spTree>
+      <p:nvGrpSpPr>
+        <p:cNvPr id="1" name=""/>
+        <p:cNvGrpSpPr/>
+        <p:nvPr/>
+      </p:nvGrpSpPr>
+      <p:grpSpPr>
+        <a:xfrm>
+          <a:off x="0" y="0"/>
+          <a:ext cx="0" cy="0"/>
+          <a:chOff x="0" y="0"/>
+          <a:chExt cx="0" cy="0"/>
+        </a:xfrm>
+      </p:grpSpPr>
+      <p:sp>
+        <p:nvSpPr>
           <p:cNvPr id="2" name="Title 1">
             <a:extLst>
               <a:ext uri="{FF2B5EF4-FFF2-40B4-BE49-F238E27FC236}">
@@ -7603,10 +8726,10 @@
         </p:nvGrpSpPr>
         <p:grpSpPr>
           <a:xfrm>
-            <a:off x="1150112" y="2783328"/>
-            <a:ext cx="6843775" cy="2952624"/>
-            <a:chOff x="762371" y="2700201"/>
-            <a:chExt cx="6843775" cy="2952624"/>
+            <a:off x="1057686" y="2783328"/>
+            <a:ext cx="6936201" cy="2952624"/>
+            <a:chOff x="669945" y="2700201"/>
+            <a:chExt cx="6936201" cy="2952624"/>
           </a:xfrm>
         </p:grpSpPr>
         <p:pic>
@@ -7741,8 +8864,8 @@
           </p:nvSpPr>
           <p:spPr>
             <a:xfrm rot="16200000">
-              <a:off x="398679" y="4055759"/>
-              <a:ext cx="1466047" cy="738664"/>
+              <a:off x="420478" y="4004325"/>
+              <a:ext cx="1237598" cy="738664"/>
             </a:xfrm>
             <a:prstGeom prst="rect">
               <a:avLst/>
@@ -7822,220 +8945,9 @@
     </p:spTree>
     <p:extLst>
       <p:ext uri="{BB962C8B-B14F-4D97-AF65-F5344CB8AC3E}">
-        <p14:creationId xmlns:p14="http://schemas.microsoft.com/office/powerpoint/2010/main" val="1005700245"/>
+        <p14:creationId xmlns:p14="http://schemas.microsoft.com/office/powerpoint/2010/main" val="4086546975"/>
       </p:ext>
     </p:extLst>
-  </p:cSld>
-  <p:clrMapOvr>
-    <a:masterClrMapping/>
-  </p:clrMapOvr>
-</p:sld>
-</file>
-
-<file path=ppt/slides/slide8.xml><?xml version="1.0" encoding="utf-8"?>
-<p:sld xmlns:a="http://schemas.openxmlformats.org/drawingml/2006/main" xmlns:r="http://schemas.openxmlformats.org/officeDocument/2006/relationships" xmlns:p="http://schemas.openxmlformats.org/presentationml/2006/main">
-  <p:cSld>
-    <p:spTree>
-      <p:nvGrpSpPr>
-        <p:cNvPr id="1" name=""/>
-        <p:cNvGrpSpPr/>
-        <p:nvPr/>
-      </p:nvGrpSpPr>
-      <p:grpSpPr>
-        <a:xfrm>
-          <a:off x="0" y="0"/>
-          <a:ext cx="0" cy="0"/>
-          <a:chOff x="0" y="0"/>
-          <a:chExt cx="0" cy="0"/>
-        </a:xfrm>
-      </p:grpSpPr>
-      <p:sp>
-        <p:nvSpPr>
-          <p:cNvPr id="2" name="Title 1"/>
-          <p:cNvSpPr>
-            <a:spLocks noGrp="1"/>
-          </p:cNvSpPr>
-          <p:nvPr>
-            <p:ph type="title"/>
-          </p:nvPr>
-        </p:nvSpPr>
-        <p:spPr>
-          <a:xfrm>
-            <a:off x="457200" y="274638"/>
-            <a:ext cx="8686800" cy="1143000"/>
-          </a:xfrm>
-        </p:spPr>
-        <p:txBody>
-          <a:bodyPr>
-            <a:normAutofit fontScale="90000"/>
-          </a:bodyPr>
-          <a:lstStyle/>
-          <a:p>
-            <a:r>
-              <a:rPr lang="en-US" dirty="0"/>
-              <a:t>Nearest neighbor matching (</a:t>
-            </a:r>
-            <a:r>
-              <a:rPr dirty="0"/>
-              <a:t>Distance-Based</a:t>
-            </a:r>
-            <a:r>
-              <a:rPr lang="en-US" dirty="0"/>
-              <a:t>)</a:t>
-            </a:r>
-            <a:endParaRPr dirty="0"/>
-          </a:p>
-        </p:txBody>
-      </p:sp>
-      <p:sp>
-        <p:nvSpPr>
-          <p:cNvPr id="3" name="Content Placeholder 2"/>
-          <p:cNvSpPr>
-            <a:spLocks noGrp="1"/>
-          </p:cNvSpPr>
-          <p:nvPr>
-            <p:ph idx="1"/>
-          </p:nvPr>
-        </p:nvSpPr>
-        <p:spPr>
-          <a:xfrm>
-            <a:off x="457200" y="1600200"/>
-            <a:ext cx="8229600" cy="4195481"/>
-          </a:xfrm>
-        </p:spPr>
-        <p:txBody>
-          <a:bodyPr>
-            <a:normAutofit/>
-          </a:bodyPr>
-          <a:lstStyle/>
-          <a:p>
-            <a:pPr marL="0" indent="0">
-              <a:buNone/>
-            </a:pPr>
-            <a:r>
-              <a:rPr lang="en-US" sz="2400" b="1" dirty="0"/>
-              <a:t>1. Define similarity</a:t>
-            </a:r>
-          </a:p>
-          <a:p>
-            <a:pPr lvl="1"/>
-            <a:r>
-              <a:rPr lang="en-US" sz="2000" dirty="0"/>
-              <a:t>You first decide how to measure “closeness”:</a:t>
-            </a:r>
-          </a:p>
-          <a:p>
-            <a:pPr lvl="1"/>
-            <a:r>
-              <a:rPr lang="en-US" sz="2000" dirty="0"/>
-              <a:t>Difference in propensity scores (most common) </a:t>
-            </a:r>
-          </a:p>
-          <a:p>
-            <a:pPr lvl="1"/>
-            <a:r>
-              <a:rPr lang="en-US" sz="2000" dirty="0"/>
-              <a:t>Or a multivariate distance like </a:t>
-            </a:r>
-            <a:r>
-              <a:rPr lang="en-US" sz="2000" dirty="0" err="1"/>
-              <a:t>Mahalanobis</a:t>
-            </a:r>
-            <a:r>
-              <a:rPr lang="en-US" sz="2000" dirty="0"/>
-              <a:t> Distance </a:t>
-            </a:r>
-          </a:p>
-          <a:p>
-            <a:pPr marL="0" indent="0">
-              <a:buNone/>
-            </a:pPr>
-            <a:r>
-              <a:rPr lang="en-US" sz="2400" b="1" dirty="0"/>
-              <a:t>2. For each treated patient:</a:t>
-            </a:r>
-          </a:p>
-          <a:p>
-            <a:pPr lvl="1"/>
-            <a:r>
-              <a:rPr lang="en-US" sz="2000" dirty="0"/>
-              <a:t>Compute distance to all control patients </a:t>
-            </a:r>
-          </a:p>
-          <a:p>
-            <a:pPr lvl="1"/>
-            <a:r>
-              <a:rPr lang="en-US" sz="2000" dirty="0"/>
-              <a:t>Select the control with the </a:t>
-            </a:r>
-            <a:r>
-              <a:rPr lang="en-US" sz="2000" b="1" dirty="0"/>
-              <a:t>smallest distance</a:t>
-            </a:r>
-            <a:r>
-              <a:rPr lang="en-US" sz="2000" dirty="0"/>
-              <a:t> </a:t>
-            </a:r>
-          </a:p>
-          <a:p>
-            <a:pPr marL="0" indent="0">
-              <a:buNone/>
-            </a:pPr>
-            <a:r>
-              <a:rPr lang="en-US" sz="2400" b="1" dirty="0"/>
-              <a:t>3. Form matched pairs (or sets)</a:t>
-            </a:r>
-          </a:p>
-          <a:p>
-            <a:pPr lvl="1"/>
-            <a:r>
-              <a:rPr lang="en-US" sz="2000" dirty="0"/>
-              <a:t>1:1 matching → one control per treated </a:t>
-            </a:r>
-          </a:p>
-          <a:p>
-            <a:pPr lvl="1"/>
-            <a:r>
-              <a:rPr lang="en-US" sz="2000" dirty="0"/>
-              <a:t>1:k matching → multiple controls per treated </a:t>
-            </a:r>
-          </a:p>
-          <a:p>
-            <a:endParaRPr sz="2400" dirty="0"/>
-          </a:p>
-        </p:txBody>
-      </p:sp>
-      <p:pic>
-        <p:nvPicPr>
-          <p:cNvPr id="7" name="Picture 6">
-            <a:extLst>
-              <a:ext uri="{FF2B5EF4-FFF2-40B4-BE49-F238E27FC236}">
-                <a16:creationId xmlns:a16="http://schemas.microsoft.com/office/drawing/2014/main" id="{99456AA2-4459-0843-B260-889E46AD1777}"/>
-              </a:ext>
-            </a:extLst>
-          </p:cNvPr>
-          <p:cNvPicPr>
-            <a:picLocks noChangeAspect="1"/>
-          </p:cNvPicPr>
-          <p:nvPr/>
-        </p:nvPicPr>
-        <p:blipFill>
-          <a:blip r:embed="rId3"/>
-          <a:stretch>
-            <a:fillRect/>
-          </a:stretch>
-        </p:blipFill>
-        <p:spPr>
-          <a:xfrm>
-            <a:off x="6178152" y="3580107"/>
-            <a:ext cx="2508648" cy="2884945"/>
-          </a:xfrm>
-          <a:prstGeom prst="rect">
-            <a:avLst/>
-          </a:prstGeom>
-        </p:spPr>
-      </p:pic>
-    </p:spTree>
   </p:cSld>
   <p:clrMapOvr>
     <a:masterClrMapping/>
@@ -8076,7 +8988,12 @@
             <p:ph type="title"/>
           </p:nvPr>
         </p:nvSpPr>
-        <p:spPr/>
+        <p:spPr>
+          <a:xfrm>
+            <a:off x="457200" y="453329"/>
+            <a:ext cx="8229600" cy="1143000"/>
+          </a:xfrm>
+        </p:spPr>
         <p:txBody>
           <a:bodyPr>
             <a:normAutofit fontScale="90000"/>
@@ -8120,7 +9037,7 @@
         <p:spPr>
           <a:xfrm>
             <a:off x="457200" y="1596329"/>
-            <a:ext cx="8417859" cy="4893647"/>
+            <a:ext cx="8417859" cy="4154984"/>
           </a:xfrm>
           <a:prstGeom prst="rect">
             <a:avLst/>
@@ -8160,20 +9077,7 @@
           <a:p>
             <a:r>
               <a:rPr lang="en-US" sz="2400" dirty="0"/>
-              <a:t>	For example: Age (range: 2090), lab values (very different 	scales) or clinical scores</a:t>
-            </a:r>
-          </a:p>
-          <a:p>
-            <a:endParaRPr lang="en-US" sz="2400" dirty="0"/>
-          </a:p>
-          <a:p>
-            <a:r>
-              <a:rPr lang="en-US" sz="2400" b="1" dirty="0"/>
-              <a:t>Intuition: </a:t>
-            </a:r>
-            <a:r>
-              <a:rPr lang="en-US" sz="2400" dirty="0"/>
-              <a:t>How unusual is this difference, given the data?</a:t>
+              <a:t>	For example: Age (range: 20-90), lab values (very different 	scales) or clinical scores</a:t>
             </a:r>
           </a:p>
           <a:p>
@@ -8226,7 +9130,7 @@
     </p:spTree>
     <p:extLst>
       <p:ext uri="{BB962C8B-B14F-4D97-AF65-F5344CB8AC3E}">
-        <p14:creationId xmlns:p14="http://schemas.microsoft.com/office/powerpoint/2010/main" val="2071652677"/>
+        <p14:creationId xmlns:p14="http://schemas.microsoft.com/office/powerpoint/2010/main" val="1107136572"/>
       </p:ext>
     </p:extLst>
   </p:cSld>
